--- a/docs/pptx/whole/ritu-linsubhr-disc-anemia2.pptx
+++ b/docs/pptx/whole/ritu-linsubhr-disc-anemia2.pptx
@@ -2916,612 +2916,612 @@
           </p:nvSpPr>
           <p:spPr>
             <a:xfrm>
-              <a:off x="1172049" y="2573495"/>
-              <a:ext cx="7090630" cy="2566926"/>
+              <a:off x="1172049" y="2600126"/>
+              <a:ext cx="7090630" cy="2538282"/>
             </a:xfrm>
             <a:custGeom>
               <a:avLst/>
               <a:pathLst>
-                <a:path w="7090630" h="2566926">
+                <a:path w="7090630" h="2538282">
                   <a:moveTo>
                     <a:pt x="0" y="0"/>
                   </a:moveTo>
                   <a:lnTo>
-                    <a:pt x="71622" y="58735"/>
-                  </a:lnTo>
-                  <a:lnTo>
-                    <a:pt x="143245" y="116315"/>
-                  </a:lnTo>
-                  <a:lnTo>
-                    <a:pt x="214867" y="172760"/>
-                  </a:lnTo>
-                  <a:lnTo>
-                    <a:pt x="286490" y="228095"/>
-                  </a:lnTo>
-                  <a:lnTo>
-                    <a:pt x="358112" y="282341"/>
-                  </a:lnTo>
-                  <a:lnTo>
-                    <a:pt x="429735" y="335518"/>
-                  </a:lnTo>
-                  <a:lnTo>
-                    <a:pt x="501357" y="387649"/>
-                  </a:lnTo>
-                  <a:lnTo>
-                    <a:pt x="572980" y="438754"/>
-                  </a:lnTo>
-                  <a:lnTo>
-                    <a:pt x="644602" y="488853"/>
-                  </a:lnTo>
-                  <a:lnTo>
-                    <a:pt x="716225" y="537965"/>
-                  </a:lnTo>
-                  <a:lnTo>
-                    <a:pt x="787847" y="586111"/>
-                  </a:lnTo>
-                  <a:lnTo>
-                    <a:pt x="859470" y="633309"/>
-                  </a:lnTo>
-                  <a:lnTo>
-                    <a:pt x="931092" y="679578"/>
-                  </a:lnTo>
-                  <a:lnTo>
-                    <a:pt x="1002715" y="724936"/>
-                  </a:lnTo>
-                  <a:lnTo>
-                    <a:pt x="1074337" y="769401"/>
-                  </a:lnTo>
-                  <a:lnTo>
-                    <a:pt x="1145960" y="812991"/>
-                  </a:lnTo>
-                  <a:lnTo>
-                    <a:pt x="1217582" y="855722"/>
-                  </a:lnTo>
-                  <a:lnTo>
-                    <a:pt x="1289205" y="897613"/>
-                  </a:lnTo>
-                  <a:lnTo>
-                    <a:pt x="1360827" y="938679"/>
-                  </a:lnTo>
-                  <a:lnTo>
-                    <a:pt x="1432450" y="978937"/>
-                  </a:lnTo>
-                  <a:lnTo>
-                    <a:pt x="1504073" y="1018402"/>
-                  </a:lnTo>
-                  <a:lnTo>
-                    <a:pt x="1575695" y="1057090"/>
-                  </a:lnTo>
-                  <a:lnTo>
-                    <a:pt x="1647318" y="1095017"/>
-                  </a:lnTo>
-                  <a:lnTo>
-                    <a:pt x="1718940" y="1132197"/>
-                  </a:lnTo>
-                  <a:lnTo>
-                    <a:pt x="1790563" y="1168645"/>
-                  </a:lnTo>
-                  <a:lnTo>
-                    <a:pt x="1862185" y="1204375"/>
-                  </a:lnTo>
-                  <a:lnTo>
-                    <a:pt x="1933808" y="1239403"/>
-                  </a:lnTo>
-                  <a:lnTo>
-                    <a:pt x="2005430" y="1273741"/>
-                  </a:lnTo>
-                  <a:lnTo>
-                    <a:pt x="2077053" y="1307402"/>
-                  </a:lnTo>
-                  <a:lnTo>
-                    <a:pt x="2148675" y="1340402"/>
-                  </a:lnTo>
-                  <a:lnTo>
-                    <a:pt x="2220298" y="1372751"/>
-                  </a:lnTo>
-                  <a:lnTo>
-                    <a:pt x="2291920" y="1404464"/>
-                  </a:lnTo>
-                  <a:lnTo>
-                    <a:pt x="2363543" y="1435553"/>
-                  </a:lnTo>
-                  <a:lnTo>
-                    <a:pt x="2435165" y="1466029"/>
-                  </a:lnTo>
-                  <a:lnTo>
-                    <a:pt x="2506788" y="1495906"/>
-                  </a:lnTo>
-                  <a:lnTo>
-                    <a:pt x="2578410" y="1525194"/>
-                  </a:lnTo>
-                  <a:lnTo>
-                    <a:pt x="2650033" y="1553906"/>
-                  </a:lnTo>
-                  <a:lnTo>
-                    <a:pt x="2721655" y="1582053"/>
-                  </a:lnTo>
-                  <a:lnTo>
-                    <a:pt x="2793278" y="1609646"/>
-                  </a:lnTo>
-                  <a:lnTo>
-                    <a:pt x="2864901" y="1636695"/>
-                  </a:lnTo>
-                  <a:lnTo>
-                    <a:pt x="2936523" y="1663212"/>
-                  </a:lnTo>
-                  <a:lnTo>
-                    <a:pt x="3008146" y="1689207"/>
-                  </a:lnTo>
-                  <a:lnTo>
-                    <a:pt x="3079768" y="1714690"/>
-                  </a:lnTo>
-                  <a:lnTo>
-                    <a:pt x="3151391" y="1739672"/>
-                  </a:lnTo>
-                  <a:lnTo>
-                    <a:pt x="3223013" y="1764162"/>
-                  </a:lnTo>
-                  <a:lnTo>
-                    <a:pt x="3294636" y="1788170"/>
-                  </a:lnTo>
-                  <a:lnTo>
-                    <a:pt x="3366258" y="1811705"/>
-                  </a:lnTo>
-                  <a:lnTo>
-                    <a:pt x="3437881" y="1834777"/>
-                  </a:lnTo>
-                  <a:lnTo>
-                    <a:pt x="3509503" y="1857395"/>
-                  </a:lnTo>
-                  <a:lnTo>
-                    <a:pt x="3581126" y="1879567"/>
-                  </a:lnTo>
-                  <a:lnTo>
-                    <a:pt x="3652748" y="1901303"/>
-                  </a:lnTo>
-                  <a:lnTo>
-                    <a:pt x="3724371" y="1922612"/>
-                  </a:lnTo>
-                  <a:lnTo>
-                    <a:pt x="3795993" y="1943500"/>
-                  </a:lnTo>
-                  <a:lnTo>
-                    <a:pt x="3867616" y="1963978"/>
-                  </a:lnTo>
-                  <a:lnTo>
-                    <a:pt x="3939238" y="1984052"/>
-                  </a:lnTo>
-                  <a:lnTo>
-                    <a:pt x="4010861" y="2003732"/>
-                  </a:lnTo>
-                  <a:lnTo>
-                    <a:pt x="4082483" y="2023023"/>
-                  </a:lnTo>
-                  <a:lnTo>
-                    <a:pt x="4154106" y="2041936"/>
-                  </a:lnTo>
-                  <a:lnTo>
-                    <a:pt x="4225729" y="2060475"/>
-                  </a:lnTo>
-                  <a:lnTo>
-                    <a:pt x="4297351" y="2078650"/>
-                  </a:lnTo>
-                  <a:lnTo>
-                    <a:pt x="4368974" y="2096467"/>
-                  </a:lnTo>
-                  <a:lnTo>
-                    <a:pt x="4440596" y="2113934"/>
-                  </a:lnTo>
-                  <a:lnTo>
-                    <a:pt x="4512219" y="2131056"/>
-                  </a:lnTo>
-                  <a:lnTo>
-                    <a:pt x="4583841" y="2147842"/>
-                  </a:lnTo>
-                  <a:lnTo>
-                    <a:pt x="4655464" y="2153118"/>
-                  </a:lnTo>
-                  <a:lnTo>
-                    <a:pt x="4727086" y="2151195"/>
-                  </a:lnTo>
-                  <a:lnTo>
-                    <a:pt x="4798709" y="2149267"/>
-                  </a:lnTo>
-                  <a:lnTo>
-                    <a:pt x="4870331" y="2147334"/>
-                  </a:lnTo>
-                  <a:lnTo>
-                    <a:pt x="4941954" y="2145397"/>
-                  </a:lnTo>
-                  <a:lnTo>
-                    <a:pt x="5013576" y="2143456"/>
-                  </a:lnTo>
-                  <a:lnTo>
-                    <a:pt x="5085199" y="2141510"/>
-                  </a:lnTo>
-                  <a:lnTo>
-                    <a:pt x="5156821" y="2139560"/>
-                  </a:lnTo>
-                  <a:lnTo>
-                    <a:pt x="5228444" y="2137605"/>
-                  </a:lnTo>
-                  <a:lnTo>
-                    <a:pt x="5300066" y="2135646"/>
-                  </a:lnTo>
-                  <a:lnTo>
-                    <a:pt x="5371689" y="2133682"/>
-                  </a:lnTo>
-                  <a:lnTo>
-                    <a:pt x="5443311" y="2131713"/>
-                  </a:lnTo>
-                  <a:lnTo>
-                    <a:pt x="5514934" y="2129740"/>
-                  </a:lnTo>
-                  <a:lnTo>
-                    <a:pt x="5586557" y="2127763"/>
-                  </a:lnTo>
-                  <a:lnTo>
-                    <a:pt x="5658179" y="2125780"/>
-                  </a:lnTo>
-                  <a:lnTo>
-                    <a:pt x="5729802" y="2123794"/>
-                  </a:lnTo>
-                  <a:lnTo>
-                    <a:pt x="5801424" y="2121802"/>
-                  </a:lnTo>
-                  <a:lnTo>
-                    <a:pt x="5873047" y="2119806"/>
-                  </a:lnTo>
-                  <a:lnTo>
-                    <a:pt x="5944669" y="2117806"/>
-                  </a:lnTo>
-                  <a:lnTo>
-                    <a:pt x="6016292" y="2115801"/>
-                  </a:lnTo>
-                  <a:lnTo>
-                    <a:pt x="6087914" y="2113791"/>
-                  </a:lnTo>
-                  <a:lnTo>
-                    <a:pt x="6159537" y="2111776"/>
-                  </a:lnTo>
-                  <a:lnTo>
-                    <a:pt x="6231159" y="2109757"/>
-                  </a:lnTo>
-                  <a:lnTo>
-                    <a:pt x="6302782" y="2107733"/>
-                  </a:lnTo>
-                  <a:lnTo>
-                    <a:pt x="6374404" y="2105705"/>
-                  </a:lnTo>
-                  <a:lnTo>
-                    <a:pt x="6446027" y="2103671"/>
-                  </a:lnTo>
-                  <a:lnTo>
-                    <a:pt x="6517649" y="2101633"/>
-                  </a:lnTo>
-                  <a:lnTo>
-                    <a:pt x="6589272" y="2099591"/>
-                  </a:lnTo>
-                  <a:lnTo>
-                    <a:pt x="6660894" y="2097543"/>
-                  </a:lnTo>
-                  <a:lnTo>
-                    <a:pt x="6732517" y="2095491"/>
-                  </a:lnTo>
-                  <a:lnTo>
-                    <a:pt x="6804139" y="2093434"/>
-                  </a:lnTo>
-                  <a:lnTo>
-                    <a:pt x="6875762" y="2091372"/>
-                  </a:lnTo>
-                  <a:lnTo>
-                    <a:pt x="6947385" y="2089306"/>
-                  </a:lnTo>
-                  <a:lnTo>
-                    <a:pt x="7019007" y="2087235"/>
-                  </a:lnTo>
-                  <a:lnTo>
-                    <a:pt x="7090630" y="2085159"/>
-                  </a:lnTo>
-                  <a:lnTo>
-                    <a:pt x="7090630" y="2566926"/>
-                  </a:lnTo>
-                  <a:lnTo>
-                    <a:pt x="7019007" y="2558556"/>
-                  </a:lnTo>
-                  <a:lnTo>
-                    <a:pt x="6947385" y="2550018"/>
-                  </a:lnTo>
-                  <a:lnTo>
-                    <a:pt x="6875762" y="2541309"/>
-                  </a:lnTo>
-                  <a:lnTo>
-                    <a:pt x="6804139" y="2532424"/>
-                  </a:lnTo>
-                  <a:lnTo>
-                    <a:pt x="6732517" y="2523361"/>
-                  </a:lnTo>
-                  <a:lnTo>
-                    <a:pt x="6660894" y="2514116"/>
-                  </a:lnTo>
-                  <a:lnTo>
-                    <a:pt x="6589272" y="2504686"/>
-                  </a:lnTo>
-                  <a:lnTo>
-                    <a:pt x="6517649" y="2495066"/>
-                  </a:lnTo>
-                  <a:lnTo>
-                    <a:pt x="6446027" y="2485253"/>
-                  </a:lnTo>
-                  <a:lnTo>
-                    <a:pt x="6374404" y="2475243"/>
-                  </a:lnTo>
-                  <a:lnTo>
-                    <a:pt x="6302782" y="2465032"/>
-                  </a:lnTo>
-                  <a:lnTo>
-                    <a:pt x="6231159" y="2454616"/>
-                  </a:lnTo>
-                  <a:lnTo>
-                    <a:pt x="6159537" y="2443990"/>
-                  </a:lnTo>
-                  <a:lnTo>
-                    <a:pt x="6087914" y="2433152"/>
-                  </a:lnTo>
-                  <a:lnTo>
-                    <a:pt x="6016292" y="2422095"/>
-                  </a:lnTo>
-                  <a:lnTo>
-                    <a:pt x="5944669" y="2410817"/>
-                  </a:lnTo>
-                  <a:lnTo>
-                    <a:pt x="5873047" y="2399312"/>
-                  </a:lnTo>
-                  <a:lnTo>
-                    <a:pt x="5801424" y="2387576"/>
-                  </a:lnTo>
-                  <a:lnTo>
-                    <a:pt x="5729802" y="2375605"/>
-                  </a:lnTo>
-                  <a:lnTo>
-                    <a:pt x="5658179" y="2363393"/>
-                  </a:lnTo>
-                  <a:lnTo>
-                    <a:pt x="5586557" y="2350936"/>
-                  </a:lnTo>
-                  <a:lnTo>
-                    <a:pt x="5514934" y="2338229"/>
-                  </a:lnTo>
-                  <a:lnTo>
-                    <a:pt x="5443311" y="2325266"/>
-                  </a:lnTo>
-                  <a:lnTo>
-                    <a:pt x="5371689" y="2312043"/>
-                  </a:lnTo>
-                  <a:lnTo>
-                    <a:pt x="5300066" y="2298555"/>
-                  </a:lnTo>
-                  <a:lnTo>
-                    <a:pt x="5228444" y="2284796"/>
-                  </a:lnTo>
-                  <a:lnTo>
-                    <a:pt x="5156821" y="2270761"/>
-                  </a:lnTo>
-                  <a:lnTo>
-                    <a:pt x="5085199" y="2256444"/>
-                  </a:lnTo>
-                  <a:lnTo>
-                    <a:pt x="5013576" y="2241839"/>
-                  </a:lnTo>
-                  <a:lnTo>
-                    <a:pt x="4941954" y="2226941"/>
-                  </a:lnTo>
-                  <a:lnTo>
-                    <a:pt x="4870331" y="2211744"/>
-                  </a:lnTo>
-                  <a:lnTo>
-                    <a:pt x="4798709" y="2196241"/>
-                  </a:lnTo>
-                  <a:lnTo>
-                    <a:pt x="4727086" y="2180428"/>
-                  </a:lnTo>
-                  <a:lnTo>
-                    <a:pt x="4655464" y="2164297"/>
-                  </a:lnTo>
-                  <a:lnTo>
-                    <a:pt x="4583841" y="2155037"/>
-                  </a:lnTo>
-                  <a:lnTo>
-                    <a:pt x="4512219" y="2156952"/>
-                  </a:lnTo>
-                  <a:lnTo>
-                    <a:pt x="4440596" y="2158862"/>
-                  </a:lnTo>
-                  <a:lnTo>
-                    <a:pt x="4368974" y="2160768"/>
-                  </a:lnTo>
-                  <a:lnTo>
-                    <a:pt x="4297351" y="2162669"/>
-                  </a:lnTo>
-                  <a:lnTo>
-                    <a:pt x="4225729" y="2164566"/>
-                  </a:lnTo>
-                  <a:lnTo>
-                    <a:pt x="4154106" y="2166458"/>
-                  </a:lnTo>
-                  <a:lnTo>
-                    <a:pt x="4082483" y="2168347"/>
-                  </a:lnTo>
-                  <a:lnTo>
-                    <a:pt x="4010861" y="2170231"/>
-                  </a:lnTo>
-                  <a:lnTo>
-                    <a:pt x="3939238" y="2172110"/>
-                  </a:lnTo>
-                  <a:lnTo>
-                    <a:pt x="3867616" y="2173985"/>
-                  </a:lnTo>
-                  <a:lnTo>
-                    <a:pt x="3795993" y="2175856"/>
-                  </a:lnTo>
-                  <a:lnTo>
-                    <a:pt x="3724371" y="2177722"/>
-                  </a:lnTo>
-                  <a:lnTo>
-                    <a:pt x="3652748" y="2179585"/>
-                  </a:lnTo>
-                  <a:lnTo>
-                    <a:pt x="3581126" y="2181442"/>
-                  </a:lnTo>
-                  <a:lnTo>
-                    <a:pt x="3509503" y="2183296"/>
-                  </a:lnTo>
-                  <a:lnTo>
-                    <a:pt x="3437881" y="2185145"/>
-                  </a:lnTo>
-                  <a:lnTo>
-                    <a:pt x="3366258" y="2186990"/>
-                  </a:lnTo>
-                  <a:lnTo>
-                    <a:pt x="3294636" y="2188831"/>
-                  </a:lnTo>
-                  <a:lnTo>
-                    <a:pt x="3223013" y="2190668"/>
-                  </a:lnTo>
-                  <a:lnTo>
-                    <a:pt x="3151391" y="2192500"/>
-                  </a:lnTo>
-                  <a:lnTo>
-                    <a:pt x="3079768" y="2194328"/>
-                  </a:lnTo>
-                  <a:lnTo>
-                    <a:pt x="3008146" y="2196152"/>
-                  </a:lnTo>
-                  <a:lnTo>
-                    <a:pt x="2936523" y="2197971"/>
-                  </a:lnTo>
-                  <a:lnTo>
-                    <a:pt x="2864901" y="2199787"/>
-                  </a:lnTo>
-                  <a:lnTo>
-                    <a:pt x="2793278" y="2201598"/>
-                  </a:lnTo>
-                  <a:lnTo>
-                    <a:pt x="2721655" y="2203405"/>
-                  </a:lnTo>
-                  <a:lnTo>
-                    <a:pt x="2650033" y="2205208"/>
-                  </a:lnTo>
-                  <a:lnTo>
-                    <a:pt x="2578410" y="2207007"/>
-                  </a:lnTo>
-                  <a:lnTo>
-                    <a:pt x="2506788" y="2208801"/>
-                  </a:lnTo>
-                  <a:lnTo>
-                    <a:pt x="2435165" y="2210591"/>
-                  </a:lnTo>
-                  <a:lnTo>
-                    <a:pt x="2363543" y="2212378"/>
-                  </a:lnTo>
-                  <a:lnTo>
-                    <a:pt x="2291920" y="2214160"/>
-                  </a:lnTo>
-                  <a:lnTo>
-                    <a:pt x="2220298" y="2215938"/>
-                  </a:lnTo>
-                  <a:lnTo>
-                    <a:pt x="2148675" y="2217712"/>
-                  </a:lnTo>
-                  <a:lnTo>
-                    <a:pt x="2077053" y="2219481"/>
-                  </a:lnTo>
-                  <a:lnTo>
-                    <a:pt x="2005430" y="2221247"/>
-                  </a:lnTo>
-                  <a:lnTo>
-                    <a:pt x="1933808" y="2223009"/>
-                  </a:lnTo>
-                  <a:lnTo>
-                    <a:pt x="1862185" y="2224766"/>
-                  </a:lnTo>
-                  <a:lnTo>
-                    <a:pt x="1790563" y="2226520"/>
-                  </a:lnTo>
-                  <a:lnTo>
-                    <a:pt x="1718940" y="2228269"/>
-                  </a:lnTo>
-                  <a:lnTo>
-                    <a:pt x="1647318" y="2230015"/>
-                  </a:lnTo>
-                  <a:lnTo>
-                    <a:pt x="1575695" y="2231756"/>
-                  </a:lnTo>
-                  <a:lnTo>
-                    <a:pt x="1504073" y="2233493"/>
-                  </a:lnTo>
-                  <a:lnTo>
-                    <a:pt x="1432450" y="2235227"/>
-                  </a:lnTo>
-                  <a:lnTo>
-                    <a:pt x="1360827" y="2236956"/>
-                  </a:lnTo>
-                  <a:lnTo>
-                    <a:pt x="1289205" y="2238681"/>
-                  </a:lnTo>
-                  <a:lnTo>
-                    <a:pt x="1217582" y="2240403"/>
-                  </a:lnTo>
-                  <a:lnTo>
-                    <a:pt x="1145960" y="2242120"/>
-                  </a:lnTo>
-                  <a:lnTo>
-                    <a:pt x="1074337" y="2243833"/>
-                  </a:lnTo>
-                  <a:lnTo>
-                    <a:pt x="1002715" y="2245543"/>
-                  </a:lnTo>
-                  <a:lnTo>
-                    <a:pt x="931092" y="2247248"/>
-                  </a:lnTo>
-                  <a:lnTo>
-                    <a:pt x="859470" y="2248950"/>
-                  </a:lnTo>
-                  <a:lnTo>
-                    <a:pt x="787847" y="2250648"/>
-                  </a:lnTo>
-                  <a:lnTo>
-                    <a:pt x="716225" y="2252341"/>
-                  </a:lnTo>
-                  <a:lnTo>
-                    <a:pt x="644602" y="2254031"/>
-                  </a:lnTo>
-                  <a:lnTo>
-                    <a:pt x="572980" y="2255717"/>
-                  </a:lnTo>
-                  <a:lnTo>
-                    <a:pt x="501357" y="2257399"/>
-                  </a:lnTo>
-                  <a:lnTo>
-                    <a:pt x="429735" y="2259077"/>
-                  </a:lnTo>
-                  <a:lnTo>
-                    <a:pt x="358112" y="2260751"/>
-                  </a:lnTo>
-                  <a:lnTo>
-                    <a:pt x="286490" y="2262422"/>
-                  </a:lnTo>
-                  <a:lnTo>
-                    <a:pt x="214867" y="2264088"/>
-                  </a:lnTo>
-                  <a:lnTo>
-                    <a:pt x="143245" y="2265751"/>
-                  </a:lnTo>
-                  <a:lnTo>
-                    <a:pt x="71622" y="2267410"/>
-                  </a:lnTo>
-                  <a:lnTo>
-                    <a:pt x="0" y="2269064"/>
+                    <a:pt x="71622" y="57807"/>
+                  </a:lnTo>
+                  <a:lnTo>
+                    <a:pt x="143245" y="114485"/>
+                  </a:lnTo>
+                  <a:lnTo>
+                    <a:pt x="214867" y="170055"/>
+                  </a:lnTo>
+                  <a:lnTo>
+                    <a:pt x="286490" y="224538"/>
+                  </a:lnTo>
+                  <a:lnTo>
+                    <a:pt x="358112" y="277956"/>
+                  </a:lnTo>
+                  <a:lnTo>
+                    <a:pt x="429735" y="330330"/>
+                  </a:lnTo>
+                  <a:lnTo>
+                    <a:pt x="501357" y="381681"/>
+                  </a:lnTo>
+                  <a:lnTo>
+                    <a:pt x="572980" y="432027"/>
+                  </a:lnTo>
+                  <a:lnTo>
+                    <a:pt x="644602" y="481389"/>
+                  </a:lnTo>
+                  <a:lnTo>
+                    <a:pt x="716225" y="529786"/>
+                  </a:lnTo>
+                  <a:lnTo>
+                    <a:pt x="787847" y="577237"/>
+                  </a:lnTo>
+                  <a:lnTo>
+                    <a:pt x="859470" y="623761"/>
+                  </a:lnTo>
+                  <a:lnTo>
+                    <a:pt x="931092" y="669375"/>
+                  </a:lnTo>
+                  <a:lnTo>
+                    <a:pt x="1002715" y="714097"/>
+                  </a:lnTo>
+                  <a:lnTo>
+                    <a:pt x="1074337" y="757945"/>
+                  </a:lnTo>
+                  <a:lnTo>
+                    <a:pt x="1145960" y="800936"/>
+                  </a:lnTo>
+                  <a:lnTo>
+                    <a:pt x="1217582" y="843087"/>
+                  </a:lnTo>
+                  <a:lnTo>
+                    <a:pt x="1289205" y="884413"/>
+                  </a:lnTo>
+                  <a:lnTo>
+                    <a:pt x="1360827" y="924932"/>
+                  </a:lnTo>
+                  <a:lnTo>
+                    <a:pt x="1432450" y="964659"/>
+                  </a:lnTo>
+                  <a:lnTo>
+                    <a:pt x="1504073" y="1003609"/>
+                  </a:lnTo>
+                  <a:lnTo>
+                    <a:pt x="1575695" y="1041797"/>
+                  </a:lnTo>
+                  <a:lnTo>
+                    <a:pt x="1647318" y="1079239"/>
+                  </a:lnTo>
+                  <a:lnTo>
+                    <a:pt x="1718940" y="1115949"/>
+                  </a:lnTo>
+                  <a:lnTo>
+                    <a:pt x="1790563" y="1151942"/>
+                  </a:lnTo>
+                  <a:lnTo>
+                    <a:pt x="1862185" y="1187230"/>
+                  </a:lnTo>
+                  <a:lnTo>
+                    <a:pt x="1933808" y="1221829"/>
+                  </a:lnTo>
+                  <a:lnTo>
+                    <a:pt x="2005430" y="1255752"/>
+                  </a:lnTo>
+                  <a:lnTo>
+                    <a:pt x="2077053" y="1289011"/>
+                  </a:lnTo>
+                  <a:lnTo>
+                    <a:pt x="2148675" y="1321621"/>
+                  </a:lnTo>
+                  <a:lnTo>
+                    <a:pt x="2220298" y="1353593"/>
+                  </a:lnTo>
+                  <a:lnTo>
+                    <a:pt x="2291920" y="1384939"/>
+                  </a:lnTo>
+                  <a:lnTo>
+                    <a:pt x="2363543" y="1415673"/>
+                  </a:lnTo>
+                  <a:lnTo>
+                    <a:pt x="2435165" y="1445807"/>
+                  </a:lnTo>
+                  <a:lnTo>
+                    <a:pt x="2506788" y="1475351"/>
+                  </a:lnTo>
+                  <a:lnTo>
+                    <a:pt x="2578410" y="1504317"/>
+                  </a:lnTo>
+                  <a:lnTo>
+                    <a:pt x="2650033" y="1532718"/>
+                  </a:lnTo>
+                  <a:lnTo>
+                    <a:pt x="2721655" y="1560563"/>
+                  </a:lnTo>
+                  <a:lnTo>
+                    <a:pt x="2793278" y="1587864"/>
+                  </a:lnTo>
+                  <a:lnTo>
+                    <a:pt x="2864901" y="1614631"/>
+                  </a:lnTo>
+                  <a:lnTo>
+                    <a:pt x="2936523" y="1640875"/>
+                  </a:lnTo>
+                  <a:lnTo>
+                    <a:pt x="3008146" y="1666606"/>
+                  </a:lnTo>
+                  <a:lnTo>
+                    <a:pt x="3079768" y="1691834"/>
+                  </a:lnTo>
+                  <a:lnTo>
+                    <a:pt x="3151391" y="1716568"/>
+                  </a:lnTo>
+                  <a:lnTo>
+                    <a:pt x="3223013" y="1740819"/>
+                  </a:lnTo>
+                  <a:lnTo>
+                    <a:pt x="3294636" y="1764596"/>
+                  </a:lnTo>
+                  <a:lnTo>
+                    <a:pt x="3366258" y="1787909"/>
+                  </a:lnTo>
+                  <a:lnTo>
+                    <a:pt x="3437881" y="1810765"/>
+                  </a:lnTo>
+                  <a:lnTo>
+                    <a:pt x="3509503" y="1833175"/>
+                  </a:lnTo>
+                  <a:lnTo>
+                    <a:pt x="3581126" y="1855147"/>
+                  </a:lnTo>
+                  <a:lnTo>
+                    <a:pt x="3652748" y="1876689"/>
+                  </a:lnTo>
+                  <a:lnTo>
+                    <a:pt x="3724371" y="1897810"/>
+                  </a:lnTo>
+                  <a:lnTo>
+                    <a:pt x="3795993" y="1918518"/>
+                  </a:lnTo>
+                  <a:lnTo>
+                    <a:pt x="3867616" y="1938821"/>
+                  </a:lnTo>
+                  <a:lnTo>
+                    <a:pt x="3939238" y="1958728"/>
+                  </a:lnTo>
+                  <a:lnTo>
+                    <a:pt x="4010861" y="1978245"/>
+                  </a:lnTo>
+                  <a:lnTo>
+                    <a:pt x="4082483" y="1997381"/>
+                  </a:lnTo>
+                  <a:lnTo>
+                    <a:pt x="4154106" y="2016142"/>
+                  </a:lnTo>
+                  <a:lnTo>
+                    <a:pt x="4225729" y="2034537"/>
+                  </a:lnTo>
+                  <a:lnTo>
+                    <a:pt x="4297351" y="2052572"/>
+                  </a:lnTo>
+                  <a:lnTo>
+                    <a:pt x="4368974" y="2070255"/>
+                  </a:lnTo>
+                  <a:lnTo>
+                    <a:pt x="4440596" y="2087592"/>
+                  </a:lnTo>
+                  <a:lnTo>
+                    <a:pt x="4512219" y="2104590"/>
+                  </a:lnTo>
+                  <a:lnTo>
+                    <a:pt x="4583841" y="2121256"/>
+                  </a:lnTo>
+                  <a:lnTo>
+                    <a:pt x="4655464" y="2126420"/>
+                  </a:lnTo>
+                  <a:lnTo>
+                    <a:pt x="4727086" y="2124386"/>
+                  </a:lnTo>
+                  <a:lnTo>
+                    <a:pt x="4798709" y="2122347"/>
+                  </a:lnTo>
+                  <a:lnTo>
+                    <a:pt x="4870331" y="2120302"/>
+                  </a:lnTo>
+                  <a:lnTo>
+                    <a:pt x="4941954" y="2118253"/>
+                  </a:lnTo>
+                  <a:lnTo>
+                    <a:pt x="5013576" y="2116199"/>
+                  </a:lnTo>
+                  <a:lnTo>
+                    <a:pt x="5085199" y="2114140"/>
+                  </a:lnTo>
+                  <a:lnTo>
+                    <a:pt x="5156821" y="2112075"/>
+                  </a:lnTo>
+                  <a:lnTo>
+                    <a:pt x="5228444" y="2110006"/>
+                  </a:lnTo>
+                  <a:lnTo>
+                    <a:pt x="5300066" y="2107932"/>
+                  </a:lnTo>
+                  <a:lnTo>
+                    <a:pt x="5371689" y="2105852"/>
+                  </a:lnTo>
+                  <a:lnTo>
+                    <a:pt x="5443311" y="2103767"/>
+                  </a:lnTo>
+                  <a:lnTo>
+                    <a:pt x="5514934" y="2101678"/>
+                  </a:lnTo>
+                  <a:lnTo>
+                    <a:pt x="5586557" y="2099583"/>
+                  </a:lnTo>
+                  <a:lnTo>
+                    <a:pt x="5658179" y="2097483"/>
+                  </a:lnTo>
+                  <a:lnTo>
+                    <a:pt x="5729802" y="2095378"/>
+                  </a:lnTo>
+                  <a:lnTo>
+                    <a:pt x="5801424" y="2093268"/>
+                  </a:lnTo>
+                  <a:lnTo>
+                    <a:pt x="5873047" y="2091152"/>
+                  </a:lnTo>
+                  <a:lnTo>
+                    <a:pt x="5944669" y="2089032"/>
+                  </a:lnTo>
+                  <a:lnTo>
+                    <a:pt x="6016292" y="2086906"/>
+                  </a:lnTo>
+                  <a:lnTo>
+                    <a:pt x="6087914" y="2084775"/>
+                  </a:lnTo>
+                  <a:lnTo>
+                    <a:pt x="6159537" y="2082639"/>
+                  </a:lnTo>
+                  <a:lnTo>
+                    <a:pt x="6231159" y="2080497"/>
+                  </a:lnTo>
+                  <a:lnTo>
+                    <a:pt x="6302782" y="2078351"/>
+                  </a:lnTo>
+                  <a:lnTo>
+                    <a:pt x="6374404" y="2076199"/>
+                  </a:lnTo>
+                  <a:lnTo>
+                    <a:pt x="6446027" y="2074041"/>
+                  </a:lnTo>
+                  <a:lnTo>
+                    <a:pt x="6517649" y="2071879"/>
+                  </a:lnTo>
+                  <a:lnTo>
+                    <a:pt x="6589272" y="2069711"/>
+                  </a:lnTo>
+                  <a:lnTo>
+                    <a:pt x="6660894" y="2067538"/>
+                  </a:lnTo>
+                  <a:lnTo>
+                    <a:pt x="6732517" y="2065360"/>
+                  </a:lnTo>
+                  <a:lnTo>
+                    <a:pt x="6804139" y="2063176"/>
+                  </a:lnTo>
+                  <a:lnTo>
+                    <a:pt x="6875762" y="2060987"/>
+                  </a:lnTo>
+                  <a:lnTo>
+                    <a:pt x="6947385" y="2058792"/>
+                  </a:lnTo>
+                  <a:lnTo>
+                    <a:pt x="7019007" y="2056592"/>
+                  </a:lnTo>
+                  <a:lnTo>
+                    <a:pt x="7090630" y="2054387"/>
+                  </a:lnTo>
+                  <a:lnTo>
+                    <a:pt x="7090630" y="2538282"/>
+                  </a:lnTo>
+                  <a:lnTo>
+                    <a:pt x="7019007" y="2529931"/>
+                  </a:lnTo>
+                  <a:lnTo>
+                    <a:pt x="6947385" y="2521414"/>
+                  </a:lnTo>
+                  <a:lnTo>
+                    <a:pt x="6875762" y="2512726"/>
+                  </a:lnTo>
+                  <a:lnTo>
+                    <a:pt x="6804139" y="2503866"/>
+                  </a:lnTo>
+                  <a:lnTo>
+                    <a:pt x="6732517" y="2494828"/>
+                  </a:lnTo>
+                  <a:lnTo>
+                    <a:pt x="6660894" y="2485611"/>
+                  </a:lnTo>
+                  <a:lnTo>
+                    <a:pt x="6589272" y="2476210"/>
+                  </a:lnTo>
+                  <a:lnTo>
+                    <a:pt x="6517649" y="2466621"/>
+                  </a:lnTo>
+                  <a:lnTo>
+                    <a:pt x="6446027" y="2456841"/>
+                  </a:lnTo>
+                  <a:lnTo>
+                    <a:pt x="6374404" y="2446867"/>
+                  </a:lnTo>
+                  <a:lnTo>
+                    <a:pt x="6302782" y="2436693"/>
+                  </a:lnTo>
+                  <a:lnTo>
+                    <a:pt x="6231159" y="2426316"/>
+                  </a:lnTo>
+                  <a:lnTo>
+                    <a:pt x="6159537" y="2415733"/>
+                  </a:lnTo>
+                  <a:lnTo>
+                    <a:pt x="6087914" y="2404938"/>
+                  </a:lnTo>
+                  <a:lnTo>
+                    <a:pt x="6016292" y="2393929"/>
+                  </a:lnTo>
+                  <a:lnTo>
+                    <a:pt x="5944669" y="2382700"/>
+                  </a:lnTo>
+                  <a:lnTo>
+                    <a:pt x="5873047" y="2371247"/>
+                  </a:lnTo>
+                  <a:lnTo>
+                    <a:pt x="5801424" y="2359565"/>
+                  </a:lnTo>
+                  <a:lnTo>
+                    <a:pt x="5729802" y="2347651"/>
+                  </a:lnTo>
+                  <a:lnTo>
+                    <a:pt x="5658179" y="2335499"/>
+                  </a:lnTo>
+                  <a:lnTo>
+                    <a:pt x="5586557" y="2323105"/>
+                  </a:lnTo>
+                  <a:lnTo>
+                    <a:pt x="5514934" y="2310463"/>
+                  </a:lnTo>
+                  <a:lnTo>
+                    <a:pt x="5443311" y="2297570"/>
+                  </a:lnTo>
+                  <a:lnTo>
+                    <a:pt x="5371689" y="2284420"/>
+                  </a:lnTo>
+                  <a:lnTo>
+                    <a:pt x="5300066" y="2271007"/>
+                  </a:lnTo>
+                  <a:lnTo>
+                    <a:pt x="5228444" y="2257327"/>
+                  </a:lnTo>
+                  <a:lnTo>
+                    <a:pt x="5156821" y="2243374"/>
+                  </a:lnTo>
+                  <a:lnTo>
+                    <a:pt x="5085199" y="2229143"/>
+                  </a:lnTo>
+                  <a:lnTo>
+                    <a:pt x="5013576" y="2214628"/>
+                  </a:lnTo>
+                  <a:lnTo>
+                    <a:pt x="4941954" y="2199824"/>
+                  </a:lnTo>
+                  <a:lnTo>
+                    <a:pt x="4870331" y="2184725"/>
+                  </a:lnTo>
+                  <a:lnTo>
+                    <a:pt x="4798709" y="2169324"/>
+                  </a:lnTo>
+                  <a:lnTo>
+                    <a:pt x="4727086" y="2153617"/>
+                  </a:lnTo>
+                  <a:lnTo>
+                    <a:pt x="4655464" y="2137596"/>
+                  </a:lnTo>
+                  <a:lnTo>
+                    <a:pt x="4583841" y="2128449"/>
+                  </a:lnTo>
+                  <a:lnTo>
+                    <a:pt x="4512219" y="2130474"/>
+                  </a:lnTo>
+                  <a:lnTo>
+                    <a:pt x="4440596" y="2132493"/>
+                  </a:lnTo>
+                  <a:lnTo>
+                    <a:pt x="4368974" y="2134507"/>
+                  </a:lnTo>
+                  <a:lnTo>
+                    <a:pt x="4297351" y="2136517"/>
+                  </a:lnTo>
+                  <a:lnTo>
+                    <a:pt x="4225729" y="2138521"/>
+                  </a:lnTo>
+                  <a:lnTo>
+                    <a:pt x="4154106" y="2140521"/>
+                  </a:lnTo>
+                  <a:lnTo>
+                    <a:pt x="4082483" y="2142516"/>
+                  </a:lnTo>
+                  <a:lnTo>
+                    <a:pt x="4010861" y="2144506"/>
+                  </a:lnTo>
+                  <a:lnTo>
+                    <a:pt x="3939238" y="2146491"/>
+                  </a:lnTo>
+                  <a:lnTo>
+                    <a:pt x="3867616" y="2148471"/>
+                  </a:lnTo>
+                  <a:lnTo>
+                    <a:pt x="3795993" y="2150447"/>
+                  </a:lnTo>
+                  <a:lnTo>
+                    <a:pt x="3724371" y="2152417"/>
+                  </a:lnTo>
+                  <a:lnTo>
+                    <a:pt x="3652748" y="2154383"/>
+                  </a:lnTo>
+                  <a:lnTo>
+                    <a:pt x="3581126" y="2156344"/>
+                  </a:lnTo>
+                  <a:lnTo>
+                    <a:pt x="3509503" y="2158300"/>
+                  </a:lnTo>
+                  <a:lnTo>
+                    <a:pt x="3437881" y="2160251"/>
+                  </a:lnTo>
+                  <a:lnTo>
+                    <a:pt x="3366258" y="2162198"/>
+                  </a:lnTo>
+                  <a:lnTo>
+                    <a:pt x="3294636" y="2164140"/>
+                  </a:lnTo>
+                  <a:lnTo>
+                    <a:pt x="3223013" y="2166077"/>
+                  </a:lnTo>
+                  <a:lnTo>
+                    <a:pt x="3151391" y="2168009"/>
+                  </a:lnTo>
+                  <a:lnTo>
+                    <a:pt x="3079768" y="2169937"/>
+                  </a:lnTo>
+                  <a:lnTo>
+                    <a:pt x="3008146" y="2171860"/>
+                  </a:lnTo>
+                  <a:lnTo>
+                    <a:pt x="2936523" y="2173778"/>
+                  </a:lnTo>
+                  <a:lnTo>
+                    <a:pt x="2864901" y="2175692"/>
+                  </a:lnTo>
+                  <a:lnTo>
+                    <a:pt x="2793278" y="2177601"/>
+                  </a:lnTo>
+                  <a:lnTo>
+                    <a:pt x="2721655" y="2179505"/>
+                  </a:lnTo>
+                  <a:lnTo>
+                    <a:pt x="2650033" y="2181405"/>
+                  </a:lnTo>
+                  <a:lnTo>
+                    <a:pt x="2578410" y="2183299"/>
+                  </a:lnTo>
+                  <a:lnTo>
+                    <a:pt x="2506788" y="2185190"/>
+                  </a:lnTo>
+                  <a:lnTo>
+                    <a:pt x="2435165" y="2187075"/>
+                  </a:lnTo>
+                  <a:lnTo>
+                    <a:pt x="2363543" y="2188957"/>
+                  </a:lnTo>
+                  <a:lnTo>
+                    <a:pt x="2291920" y="2190833"/>
+                  </a:lnTo>
+                  <a:lnTo>
+                    <a:pt x="2220298" y="2192705"/>
+                  </a:lnTo>
+                  <a:lnTo>
+                    <a:pt x="2148675" y="2194572"/>
+                  </a:lnTo>
+                  <a:lnTo>
+                    <a:pt x="2077053" y="2196435"/>
+                  </a:lnTo>
+                  <a:lnTo>
+                    <a:pt x="2005430" y="2198293"/>
+                  </a:lnTo>
+                  <a:lnTo>
+                    <a:pt x="1933808" y="2200147"/>
+                  </a:lnTo>
+                  <a:lnTo>
+                    <a:pt x="1862185" y="2201996"/>
+                  </a:lnTo>
+                  <a:lnTo>
+                    <a:pt x="1790563" y="2203841"/>
+                  </a:lnTo>
+                  <a:lnTo>
+                    <a:pt x="1718940" y="2205681"/>
+                  </a:lnTo>
+                  <a:lnTo>
+                    <a:pt x="1647318" y="2207517"/>
+                  </a:lnTo>
+                  <a:lnTo>
+                    <a:pt x="1575695" y="2209348"/>
+                  </a:lnTo>
+                  <a:lnTo>
+                    <a:pt x="1504073" y="2211174"/>
+                  </a:lnTo>
+                  <a:lnTo>
+                    <a:pt x="1432450" y="2212997"/>
+                  </a:lnTo>
+                  <a:lnTo>
+                    <a:pt x="1360827" y="2214814"/>
+                  </a:lnTo>
+                  <a:lnTo>
+                    <a:pt x="1289205" y="2216628"/>
+                  </a:lnTo>
+                  <a:lnTo>
+                    <a:pt x="1217582" y="2218437"/>
+                  </a:lnTo>
+                  <a:lnTo>
+                    <a:pt x="1145960" y="2220241"/>
+                  </a:lnTo>
+                  <a:lnTo>
+                    <a:pt x="1074337" y="2222041"/>
+                  </a:lnTo>
+                  <a:lnTo>
+                    <a:pt x="1002715" y="2223837"/>
+                  </a:lnTo>
+                  <a:lnTo>
+                    <a:pt x="931092" y="2225628"/>
+                  </a:lnTo>
+                  <a:lnTo>
+                    <a:pt x="859470" y="2227415"/>
+                  </a:lnTo>
+                  <a:lnTo>
+                    <a:pt x="787847" y="2229198"/>
+                  </a:lnTo>
+                  <a:lnTo>
+                    <a:pt x="716225" y="2230976"/>
+                  </a:lnTo>
+                  <a:lnTo>
+                    <a:pt x="644602" y="2232750"/>
+                  </a:lnTo>
+                  <a:lnTo>
+                    <a:pt x="572980" y="2234519"/>
+                  </a:lnTo>
+                  <a:lnTo>
+                    <a:pt x="501357" y="2236284"/>
+                  </a:lnTo>
+                  <a:lnTo>
+                    <a:pt x="429735" y="2238045"/>
+                  </a:lnTo>
+                  <a:lnTo>
+                    <a:pt x="358112" y="2239802"/>
+                  </a:lnTo>
+                  <a:lnTo>
+                    <a:pt x="286490" y="2241554"/>
+                  </a:lnTo>
+                  <a:lnTo>
+                    <a:pt x="214867" y="2243302"/>
+                  </a:lnTo>
+                  <a:lnTo>
+                    <a:pt x="143245" y="2245046"/>
+                  </a:lnTo>
+                  <a:lnTo>
+                    <a:pt x="71622" y="2246785"/>
+                  </a:lnTo>
+                  <a:lnTo>
+                    <a:pt x="0" y="2248521"/>
                   </a:lnTo>
                   <a:close/>
                 </a:path>
@@ -3547,312 +3547,312 @@
           </p:nvSpPr>
           <p:spPr>
             <a:xfrm>
-              <a:off x="1172049" y="2573495"/>
-              <a:ext cx="7090630" cy="2153118"/>
+              <a:off x="1172049" y="2600126"/>
+              <a:ext cx="7090630" cy="2126420"/>
             </a:xfrm>
             <a:custGeom>
               <a:avLst/>
               <a:pathLst>
-                <a:path w="7090630" h="2153118">
+                <a:path w="7090630" h="2126420">
                   <a:moveTo>
                     <a:pt x="0" y="0"/>
                   </a:moveTo>
                   <a:lnTo>
-                    <a:pt x="71622" y="58735"/>
-                  </a:lnTo>
-                  <a:lnTo>
-                    <a:pt x="143245" y="116315"/>
-                  </a:lnTo>
-                  <a:lnTo>
-                    <a:pt x="214867" y="172760"/>
-                  </a:lnTo>
-                  <a:lnTo>
-                    <a:pt x="286490" y="228095"/>
-                  </a:lnTo>
-                  <a:lnTo>
-                    <a:pt x="358112" y="282341"/>
-                  </a:lnTo>
-                  <a:lnTo>
-                    <a:pt x="429735" y="335518"/>
-                  </a:lnTo>
-                  <a:lnTo>
-                    <a:pt x="501357" y="387649"/>
-                  </a:lnTo>
-                  <a:lnTo>
-                    <a:pt x="572980" y="438754"/>
-                  </a:lnTo>
-                  <a:lnTo>
-                    <a:pt x="644602" y="488853"/>
-                  </a:lnTo>
-                  <a:lnTo>
-                    <a:pt x="716225" y="537965"/>
-                  </a:lnTo>
-                  <a:lnTo>
-                    <a:pt x="787847" y="586111"/>
-                  </a:lnTo>
-                  <a:lnTo>
-                    <a:pt x="859470" y="633309"/>
-                  </a:lnTo>
-                  <a:lnTo>
-                    <a:pt x="931092" y="679578"/>
-                  </a:lnTo>
-                  <a:lnTo>
-                    <a:pt x="1002715" y="724936"/>
-                  </a:lnTo>
-                  <a:lnTo>
-                    <a:pt x="1074337" y="769401"/>
-                  </a:lnTo>
-                  <a:lnTo>
-                    <a:pt x="1145960" y="812991"/>
-                  </a:lnTo>
-                  <a:lnTo>
-                    <a:pt x="1217582" y="855722"/>
-                  </a:lnTo>
-                  <a:lnTo>
-                    <a:pt x="1289205" y="897613"/>
-                  </a:lnTo>
-                  <a:lnTo>
-                    <a:pt x="1360827" y="938679"/>
-                  </a:lnTo>
-                  <a:lnTo>
-                    <a:pt x="1432450" y="978937"/>
-                  </a:lnTo>
-                  <a:lnTo>
-                    <a:pt x="1504073" y="1018402"/>
-                  </a:lnTo>
-                  <a:lnTo>
-                    <a:pt x="1575695" y="1057090"/>
-                  </a:lnTo>
-                  <a:lnTo>
-                    <a:pt x="1647318" y="1095017"/>
-                  </a:lnTo>
-                  <a:lnTo>
-                    <a:pt x="1718940" y="1132197"/>
-                  </a:lnTo>
-                  <a:lnTo>
-                    <a:pt x="1790563" y="1168645"/>
-                  </a:lnTo>
-                  <a:lnTo>
-                    <a:pt x="1862185" y="1204375"/>
-                  </a:lnTo>
-                  <a:lnTo>
-                    <a:pt x="1933808" y="1239403"/>
-                  </a:lnTo>
-                  <a:lnTo>
-                    <a:pt x="2005430" y="1273741"/>
-                  </a:lnTo>
-                  <a:lnTo>
-                    <a:pt x="2077053" y="1307402"/>
-                  </a:lnTo>
-                  <a:lnTo>
-                    <a:pt x="2148675" y="1340402"/>
-                  </a:lnTo>
-                  <a:lnTo>
-                    <a:pt x="2220298" y="1372751"/>
-                  </a:lnTo>
-                  <a:lnTo>
-                    <a:pt x="2291920" y="1404464"/>
-                  </a:lnTo>
-                  <a:lnTo>
-                    <a:pt x="2363543" y="1435553"/>
-                  </a:lnTo>
-                  <a:lnTo>
-                    <a:pt x="2435165" y="1466029"/>
-                  </a:lnTo>
-                  <a:lnTo>
-                    <a:pt x="2506788" y="1495906"/>
-                  </a:lnTo>
-                  <a:lnTo>
-                    <a:pt x="2578410" y="1525194"/>
-                  </a:lnTo>
-                  <a:lnTo>
-                    <a:pt x="2650033" y="1553906"/>
-                  </a:lnTo>
-                  <a:lnTo>
-                    <a:pt x="2721655" y="1582053"/>
-                  </a:lnTo>
-                  <a:lnTo>
-                    <a:pt x="2793278" y="1609646"/>
-                  </a:lnTo>
-                  <a:lnTo>
-                    <a:pt x="2864901" y="1636695"/>
-                  </a:lnTo>
-                  <a:lnTo>
-                    <a:pt x="2936523" y="1663212"/>
-                  </a:lnTo>
-                  <a:lnTo>
-                    <a:pt x="3008146" y="1689207"/>
-                  </a:lnTo>
-                  <a:lnTo>
-                    <a:pt x="3079768" y="1714690"/>
-                  </a:lnTo>
-                  <a:lnTo>
-                    <a:pt x="3151391" y="1739672"/>
-                  </a:lnTo>
-                  <a:lnTo>
-                    <a:pt x="3223013" y="1764162"/>
-                  </a:lnTo>
-                  <a:lnTo>
-                    <a:pt x="3294636" y="1788170"/>
-                  </a:lnTo>
-                  <a:lnTo>
-                    <a:pt x="3366258" y="1811705"/>
-                  </a:lnTo>
-                  <a:lnTo>
-                    <a:pt x="3437881" y="1834777"/>
-                  </a:lnTo>
-                  <a:lnTo>
-                    <a:pt x="3509503" y="1857395"/>
-                  </a:lnTo>
-                  <a:lnTo>
-                    <a:pt x="3581126" y="1879567"/>
-                  </a:lnTo>
-                  <a:lnTo>
-                    <a:pt x="3652748" y="1901303"/>
-                  </a:lnTo>
-                  <a:lnTo>
-                    <a:pt x="3724371" y="1922612"/>
-                  </a:lnTo>
-                  <a:lnTo>
-                    <a:pt x="3795993" y="1943500"/>
-                  </a:lnTo>
-                  <a:lnTo>
-                    <a:pt x="3867616" y="1963978"/>
-                  </a:lnTo>
-                  <a:lnTo>
-                    <a:pt x="3939238" y="1984052"/>
-                  </a:lnTo>
-                  <a:lnTo>
-                    <a:pt x="4010861" y="2003732"/>
-                  </a:lnTo>
-                  <a:lnTo>
-                    <a:pt x="4082483" y="2023023"/>
-                  </a:lnTo>
-                  <a:lnTo>
-                    <a:pt x="4154106" y="2041936"/>
-                  </a:lnTo>
-                  <a:lnTo>
-                    <a:pt x="4225729" y="2060475"/>
-                  </a:lnTo>
-                  <a:lnTo>
-                    <a:pt x="4297351" y="2078650"/>
-                  </a:lnTo>
-                  <a:lnTo>
-                    <a:pt x="4368974" y="2096467"/>
-                  </a:lnTo>
-                  <a:lnTo>
-                    <a:pt x="4440596" y="2113934"/>
-                  </a:lnTo>
-                  <a:lnTo>
-                    <a:pt x="4512219" y="2131056"/>
-                  </a:lnTo>
-                  <a:lnTo>
-                    <a:pt x="4583841" y="2147842"/>
-                  </a:lnTo>
-                  <a:lnTo>
-                    <a:pt x="4655464" y="2153118"/>
-                  </a:lnTo>
-                  <a:lnTo>
-                    <a:pt x="4727086" y="2151195"/>
-                  </a:lnTo>
-                  <a:lnTo>
-                    <a:pt x="4798709" y="2149267"/>
-                  </a:lnTo>
-                  <a:lnTo>
-                    <a:pt x="4870331" y="2147334"/>
-                  </a:lnTo>
-                  <a:lnTo>
-                    <a:pt x="4941954" y="2145397"/>
-                  </a:lnTo>
-                  <a:lnTo>
-                    <a:pt x="5013576" y="2143456"/>
-                  </a:lnTo>
-                  <a:lnTo>
-                    <a:pt x="5085199" y="2141510"/>
-                  </a:lnTo>
-                  <a:lnTo>
-                    <a:pt x="5156821" y="2139560"/>
-                  </a:lnTo>
-                  <a:lnTo>
-                    <a:pt x="5228444" y="2137605"/>
-                  </a:lnTo>
-                  <a:lnTo>
-                    <a:pt x="5300066" y="2135646"/>
-                  </a:lnTo>
-                  <a:lnTo>
-                    <a:pt x="5371689" y="2133682"/>
-                  </a:lnTo>
-                  <a:lnTo>
-                    <a:pt x="5443311" y="2131713"/>
-                  </a:lnTo>
-                  <a:lnTo>
-                    <a:pt x="5514934" y="2129740"/>
-                  </a:lnTo>
-                  <a:lnTo>
-                    <a:pt x="5586557" y="2127763"/>
-                  </a:lnTo>
-                  <a:lnTo>
-                    <a:pt x="5658179" y="2125780"/>
-                  </a:lnTo>
-                  <a:lnTo>
-                    <a:pt x="5729802" y="2123794"/>
-                  </a:lnTo>
-                  <a:lnTo>
-                    <a:pt x="5801424" y="2121802"/>
-                  </a:lnTo>
-                  <a:lnTo>
-                    <a:pt x="5873047" y="2119806"/>
-                  </a:lnTo>
-                  <a:lnTo>
-                    <a:pt x="5944669" y="2117806"/>
-                  </a:lnTo>
-                  <a:lnTo>
-                    <a:pt x="6016292" y="2115801"/>
-                  </a:lnTo>
-                  <a:lnTo>
-                    <a:pt x="6087914" y="2113791"/>
-                  </a:lnTo>
-                  <a:lnTo>
-                    <a:pt x="6159537" y="2111776"/>
-                  </a:lnTo>
-                  <a:lnTo>
-                    <a:pt x="6231159" y="2109757"/>
-                  </a:lnTo>
-                  <a:lnTo>
-                    <a:pt x="6302782" y="2107733"/>
-                  </a:lnTo>
-                  <a:lnTo>
-                    <a:pt x="6374404" y="2105705"/>
-                  </a:lnTo>
-                  <a:lnTo>
-                    <a:pt x="6446027" y="2103671"/>
-                  </a:lnTo>
-                  <a:lnTo>
-                    <a:pt x="6517649" y="2101633"/>
-                  </a:lnTo>
-                  <a:lnTo>
-                    <a:pt x="6589272" y="2099591"/>
-                  </a:lnTo>
-                  <a:lnTo>
-                    <a:pt x="6660894" y="2097543"/>
-                  </a:lnTo>
-                  <a:lnTo>
-                    <a:pt x="6732517" y="2095491"/>
-                  </a:lnTo>
-                  <a:lnTo>
-                    <a:pt x="6804139" y="2093434"/>
-                  </a:lnTo>
-                  <a:lnTo>
-                    <a:pt x="6875762" y="2091372"/>
-                  </a:lnTo>
-                  <a:lnTo>
-                    <a:pt x="6947385" y="2089306"/>
-                  </a:lnTo>
-                  <a:lnTo>
-                    <a:pt x="7019007" y="2087235"/>
-                  </a:lnTo>
-                  <a:lnTo>
-                    <a:pt x="7090630" y="2085159"/>
+                    <a:pt x="71622" y="57807"/>
+                  </a:lnTo>
+                  <a:lnTo>
+                    <a:pt x="143245" y="114485"/>
+                  </a:lnTo>
+                  <a:lnTo>
+                    <a:pt x="214867" y="170055"/>
+                  </a:lnTo>
+                  <a:lnTo>
+                    <a:pt x="286490" y="224538"/>
+                  </a:lnTo>
+                  <a:lnTo>
+                    <a:pt x="358112" y="277956"/>
+                  </a:lnTo>
+                  <a:lnTo>
+                    <a:pt x="429735" y="330330"/>
+                  </a:lnTo>
+                  <a:lnTo>
+                    <a:pt x="501357" y="381681"/>
+                  </a:lnTo>
+                  <a:lnTo>
+                    <a:pt x="572980" y="432027"/>
+                  </a:lnTo>
+                  <a:lnTo>
+                    <a:pt x="644602" y="481389"/>
+                  </a:lnTo>
+                  <a:lnTo>
+                    <a:pt x="716225" y="529786"/>
+                  </a:lnTo>
+                  <a:lnTo>
+                    <a:pt x="787847" y="577237"/>
+                  </a:lnTo>
+                  <a:lnTo>
+                    <a:pt x="859470" y="623761"/>
+                  </a:lnTo>
+                  <a:lnTo>
+                    <a:pt x="931092" y="669375"/>
+                  </a:lnTo>
+                  <a:lnTo>
+                    <a:pt x="1002715" y="714097"/>
+                  </a:lnTo>
+                  <a:lnTo>
+                    <a:pt x="1074337" y="757945"/>
+                  </a:lnTo>
+                  <a:lnTo>
+                    <a:pt x="1145960" y="800936"/>
+                  </a:lnTo>
+                  <a:lnTo>
+                    <a:pt x="1217582" y="843087"/>
+                  </a:lnTo>
+                  <a:lnTo>
+                    <a:pt x="1289205" y="884413"/>
+                  </a:lnTo>
+                  <a:lnTo>
+                    <a:pt x="1360827" y="924932"/>
+                  </a:lnTo>
+                  <a:lnTo>
+                    <a:pt x="1432450" y="964659"/>
+                  </a:lnTo>
+                  <a:lnTo>
+                    <a:pt x="1504073" y="1003609"/>
+                  </a:lnTo>
+                  <a:lnTo>
+                    <a:pt x="1575695" y="1041797"/>
+                  </a:lnTo>
+                  <a:lnTo>
+                    <a:pt x="1647318" y="1079239"/>
+                  </a:lnTo>
+                  <a:lnTo>
+                    <a:pt x="1718940" y="1115949"/>
+                  </a:lnTo>
+                  <a:lnTo>
+                    <a:pt x="1790563" y="1151942"/>
+                  </a:lnTo>
+                  <a:lnTo>
+                    <a:pt x="1862185" y="1187230"/>
+                  </a:lnTo>
+                  <a:lnTo>
+                    <a:pt x="1933808" y="1221829"/>
+                  </a:lnTo>
+                  <a:lnTo>
+                    <a:pt x="2005430" y="1255752"/>
+                  </a:lnTo>
+                  <a:lnTo>
+                    <a:pt x="2077053" y="1289011"/>
+                  </a:lnTo>
+                  <a:lnTo>
+                    <a:pt x="2148675" y="1321621"/>
+                  </a:lnTo>
+                  <a:lnTo>
+                    <a:pt x="2220298" y="1353593"/>
+                  </a:lnTo>
+                  <a:lnTo>
+                    <a:pt x="2291920" y="1384939"/>
+                  </a:lnTo>
+                  <a:lnTo>
+                    <a:pt x="2363543" y="1415673"/>
+                  </a:lnTo>
+                  <a:lnTo>
+                    <a:pt x="2435165" y="1445807"/>
+                  </a:lnTo>
+                  <a:lnTo>
+                    <a:pt x="2506788" y="1475351"/>
+                  </a:lnTo>
+                  <a:lnTo>
+                    <a:pt x="2578410" y="1504317"/>
+                  </a:lnTo>
+                  <a:lnTo>
+                    <a:pt x="2650033" y="1532718"/>
+                  </a:lnTo>
+                  <a:lnTo>
+                    <a:pt x="2721655" y="1560563"/>
+                  </a:lnTo>
+                  <a:lnTo>
+                    <a:pt x="2793278" y="1587864"/>
+                  </a:lnTo>
+                  <a:lnTo>
+                    <a:pt x="2864901" y="1614631"/>
+                  </a:lnTo>
+                  <a:lnTo>
+                    <a:pt x="2936523" y="1640875"/>
+                  </a:lnTo>
+                  <a:lnTo>
+                    <a:pt x="3008146" y="1666606"/>
+                  </a:lnTo>
+                  <a:lnTo>
+                    <a:pt x="3079768" y="1691834"/>
+                  </a:lnTo>
+                  <a:lnTo>
+                    <a:pt x="3151391" y="1716568"/>
+                  </a:lnTo>
+                  <a:lnTo>
+                    <a:pt x="3223013" y="1740819"/>
+                  </a:lnTo>
+                  <a:lnTo>
+                    <a:pt x="3294636" y="1764596"/>
+                  </a:lnTo>
+                  <a:lnTo>
+                    <a:pt x="3366258" y="1787909"/>
+                  </a:lnTo>
+                  <a:lnTo>
+                    <a:pt x="3437881" y="1810765"/>
+                  </a:lnTo>
+                  <a:lnTo>
+                    <a:pt x="3509503" y="1833175"/>
+                  </a:lnTo>
+                  <a:lnTo>
+                    <a:pt x="3581126" y="1855147"/>
+                  </a:lnTo>
+                  <a:lnTo>
+                    <a:pt x="3652748" y="1876689"/>
+                  </a:lnTo>
+                  <a:lnTo>
+                    <a:pt x="3724371" y="1897810"/>
+                  </a:lnTo>
+                  <a:lnTo>
+                    <a:pt x="3795993" y="1918518"/>
+                  </a:lnTo>
+                  <a:lnTo>
+                    <a:pt x="3867616" y="1938821"/>
+                  </a:lnTo>
+                  <a:lnTo>
+                    <a:pt x="3939238" y="1958728"/>
+                  </a:lnTo>
+                  <a:lnTo>
+                    <a:pt x="4010861" y="1978245"/>
+                  </a:lnTo>
+                  <a:lnTo>
+                    <a:pt x="4082483" y="1997381"/>
+                  </a:lnTo>
+                  <a:lnTo>
+                    <a:pt x="4154106" y="2016142"/>
+                  </a:lnTo>
+                  <a:lnTo>
+                    <a:pt x="4225729" y="2034537"/>
+                  </a:lnTo>
+                  <a:lnTo>
+                    <a:pt x="4297351" y="2052572"/>
+                  </a:lnTo>
+                  <a:lnTo>
+                    <a:pt x="4368974" y="2070255"/>
+                  </a:lnTo>
+                  <a:lnTo>
+                    <a:pt x="4440596" y="2087592"/>
+                  </a:lnTo>
+                  <a:lnTo>
+                    <a:pt x="4512219" y="2104590"/>
+                  </a:lnTo>
+                  <a:lnTo>
+                    <a:pt x="4583841" y="2121256"/>
+                  </a:lnTo>
+                  <a:lnTo>
+                    <a:pt x="4655464" y="2126420"/>
+                  </a:lnTo>
+                  <a:lnTo>
+                    <a:pt x="4727086" y="2124386"/>
+                  </a:lnTo>
+                  <a:lnTo>
+                    <a:pt x="4798709" y="2122347"/>
+                  </a:lnTo>
+                  <a:lnTo>
+                    <a:pt x="4870331" y="2120302"/>
+                  </a:lnTo>
+                  <a:lnTo>
+                    <a:pt x="4941954" y="2118253"/>
+                  </a:lnTo>
+                  <a:lnTo>
+                    <a:pt x="5013576" y="2116199"/>
+                  </a:lnTo>
+                  <a:lnTo>
+                    <a:pt x="5085199" y="2114140"/>
+                  </a:lnTo>
+                  <a:lnTo>
+                    <a:pt x="5156821" y="2112075"/>
+                  </a:lnTo>
+                  <a:lnTo>
+                    <a:pt x="5228444" y="2110006"/>
+                  </a:lnTo>
+                  <a:lnTo>
+                    <a:pt x="5300066" y="2107932"/>
+                  </a:lnTo>
+                  <a:lnTo>
+                    <a:pt x="5371689" y="2105852"/>
+                  </a:lnTo>
+                  <a:lnTo>
+                    <a:pt x="5443311" y="2103767"/>
+                  </a:lnTo>
+                  <a:lnTo>
+                    <a:pt x="5514934" y="2101678"/>
+                  </a:lnTo>
+                  <a:lnTo>
+                    <a:pt x="5586557" y="2099583"/>
+                  </a:lnTo>
+                  <a:lnTo>
+                    <a:pt x="5658179" y="2097483"/>
+                  </a:lnTo>
+                  <a:lnTo>
+                    <a:pt x="5729802" y="2095378"/>
+                  </a:lnTo>
+                  <a:lnTo>
+                    <a:pt x="5801424" y="2093268"/>
+                  </a:lnTo>
+                  <a:lnTo>
+                    <a:pt x="5873047" y="2091152"/>
+                  </a:lnTo>
+                  <a:lnTo>
+                    <a:pt x="5944669" y="2089032"/>
+                  </a:lnTo>
+                  <a:lnTo>
+                    <a:pt x="6016292" y="2086906"/>
+                  </a:lnTo>
+                  <a:lnTo>
+                    <a:pt x="6087914" y="2084775"/>
+                  </a:lnTo>
+                  <a:lnTo>
+                    <a:pt x="6159537" y="2082639"/>
+                  </a:lnTo>
+                  <a:lnTo>
+                    <a:pt x="6231159" y="2080497"/>
+                  </a:lnTo>
+                  <a:lnTo>
+                    <a:pt x="6302782" y="2078351"/>
+                  </a:lnTo>
+                  <a:lnTo>
+                    <a:pt x="6374404" y="2076199"/>
+                  </a:lnTo>
+                  <a:lnTo>
+                    <a:pt x="6446027" y="2074041"/>
+                  </a:lnTo>
+                  <a:lnTo>
+                    <a:pt x="6517649" y="2071879"/>
+                  </a:lnTo>
+                  <a:lnTo>
+                    <a:pt x="6589272" y="2069711"/>
+                  </a:lnTo>
+                  <a:lnTo>
+                    <a:pt x="6660894" y="2067538"/>
+                  </a:lnTo>
+                  <a:lnTo>
+                    <a:pt x="6732517" y="2065360"/>
+                  </a:lnTo>
+                  <a:lnTo>
+                    <a:pt x="6804139" y="2063176"/>
+                  </a:lnTo>
+                  <a:lnTo>
+                    <a:pt x="6875762" y="2060987"/>
+                  </a:lnTo>
+                  <a:lnTo>
+                    <a:pt x="6947385" y="2058792"/>
+                  </a:lnTo>
+                  <a:lnTo>
+                    <a:pt x="7019007" y="2056592"/>
+                  </a:lnTo>
+                  <a:lnTo>
+                    <a:pt x="7090630" y="2054387"/>
                   </a:lnTo>
                 </a:path>
               </a:pathLst>
@@ -3872,312 +3872,312 @@
           </p:nvSpPr>
           <p:spPr>
             <a:xfrm>
-              <a:off x="1172049" y="4728533"/>
-              <a:ext cx="7090630" cy="411889"/>
+              <a:off x="1172049" y="4728576"/>
+              <a:ext cx="7090630" cy="409832"/>
             </a:xfrm>
             <a:custGeom>
               <a:avLst/>
               <a:pathLst>
-                <a:path w="7090630" h="411889">
+                <a:path w="7090630" h="409832">
                   <a:moveTo>
-                    <a:pt x="7090630" y="411889"/>
+                    <a:pt x="7090630" y="409832"/>
                   </a:moveTo>
                   <a:lnTo>
-                    <a:pt x="7019007" y="403519"/>
-                  </a:lnTo>
-                  <a:lnTo>
-                    <a:pt x="6947385" y="394981"/>
-                  </a:lnTo>
-                  <a:lnTo>
-                    <a:pt x="6875762" y="386271"/>
-                  </a:lnTo>
-                  <a:lnTo>
-                    <a:pt x="6804139" y="377387"/>
-                  </a:lnTo>
-                  <a:lnTo>
-                    <a:pt x="6732517" y="368324"/>
-                  </a:lnTo>
-                  <a:lnTo>
-                    <a:pt x="6660894" y="359079"/>
-                  </a:lnTo>
-                  <a:lnTo>
-                    <a:pt x="6589272" y="349648"/>
-                  </a:lnTo>
-                  <a:lnTo>
-                    <a:pt x="6517649" y="340028"/>
-                  </a:lnTo>
-                  <a:lnTo>
-                    <a:pt x="6446027" y="330215"/>
-                  </a:lnTo>
-                  <a:lnTo>
-                    <a:pt x="6374404" y="320205"/>
-                  </a:lnTo>
-                  <a:lnTo>
-                    <a:pt x="6302782" y="309994"/>
-                  </a:lnTo>
-                  <a:lnTo>
-                    <a:pt x="6231159" y="299578"/>
-                  </a:lnTo>
-                  <a:lnTo>
-                    <a:pt x="6159537" y="288953"/>
-                  </a:lnTo>
-                  <a:lnTo>
-                    <a:pt x="6087914" y="278114"/>
-                  </a:lnTo>
-                  <a:lnTo>
-                    <a:pt x="6016292" y="267058"/>
-                  </a:lnTo>
-                  <a:lnTo>
-                    <a:pt x="5944669" y="255779"/>
-                  </a:lnTo>
-                  <a:lnTo>
-                    <a:pt x="5873047" y="244274"/>
-                  </a:lnTo>
-                  <a:lnTo>
-                    <a:pt x="5801424" y="232539"/>
-                  </a:lnTo>
-                  <a:lnTo>
-                    <a:pt x="5729802" y="220567"/>
-                  </a:lnTo>
-                  <a:lnTo>
-                    <a:pt x="5658179" y="208355"/>
-                  </a:lnTo>
-                  <a:lnTo>
-                    <a:pt x="5586557" y="195898"/>
-                  </a:lnTo>
-                  <a:lnTo>
-                    <a:pt x="5514934" y="183191"/>
-                  </a:lnTo>
-                  <a:lnTo>
-                    <a:pt x="5443311" y="170228"/>
-                  </a:lnTo>
-                  <a:lnTo>
-                    <a:pt x="5371689" y="157006"/>
-                  </a:lnTo>
-                  <a:lnTo>
-                    <a:pt x="5300066" y="143518"/>
-                  </a:lnTo>
-                  <a:lnTo>
-                    <a:pt x="5228444" y="129758"/>
-                  </a:lnTo>
-                  <a:lnTo>
-                    <a:pt x="5156821" y="115723"/>
-                  </a:lnTo>
-                  <a:lnTo>
-                    <a:pt x="5085199" y="101406"/>
-                  </a:lnTo>
-                  <a:lnTo>
-                    <a:pt x="5013576" y="86801"/>
-                  </a:lnTo>
-                  <a:lnTo>
-                    <a:pt x="4941954" y="71903"/>
-                  </a:lnTo>
-                  <a:lnTo>
-                    <a:pt x="4870331" y="56706"/>
-                  </a:lnTo>
-                  <a:lnTo>
-                    <a:pt x="4798709" y="41204"/>
-                  </a:lnTo>
-                  <a:lnTo>
-                    <a:pt x="4727086" y="25390"/>
-                  </a:lnTo>
-                  <a:lnTo>
-                    <a:pt x="4655464" y="9259"/>
+                    <a:pt x="7019007" y="401481"/>
+                  </a:lnTo>
+                  <a:lnTo>
+                    <a:pt x="6947385" y="392964"/>
+                  </a:lnTo>
+                  <a:lnTo>
+                    <a:pt x="6875762" y="384277"/>
+                  </a:lnTo>
+                  <a:lnTo>
+                    <a:pt x="6804139" y="375416"/>
+                  </a:lnTo>
+                  <a:lnTo>
+                    <a:pt x="6732517" y="366379"/>
+                  </a:lnTo>
+                  <a:lnTo>
+                    <a:pt x="6660894" y="357161"/>
+                  </a:lnTo>
+                  <a:lnTo>
+                    <a:pt x="6589272" y="347760"/>
+                  </a:lnTo>
+                  <a:lnTo>
+                    <a:pt x="6517649" y="338172"/>
+                  </a:lnTo>
+                  <a:lnTo>
+                    <a:pt x="6446027" y="328392"/>
+                  </a:lnTo>
+                  <a:lnTo>
+                    <a:pt x="6374404" y="318417"/>
+                  </a:lnTo>
+                  <a:lnTo>
+                    <a:pt x="6302782" y="308243"/>
+                  </a:lnTo>
+                  <a:lnTo>
+                    <a:pt x="6231159" y="297867"/>
+                  </a:lnTo>
+                  <a:lnTo>
+                    <a:pt x="6159537" y="287283"/>
+                  </a:lnTo>
+                  <a:lnTo>
+                    <a:pt x="6087914" y="276489"/>
+                  </a:lnTo>
+                  <a:lnTo>
+                    <a:pt x="6016292" y="265479"/>
+                  </a:lnTo>
+                  <a:lnTo>
+                    <a:pt x="5944669" y="254250"/>
+                  </a:lnTo>
+                  <a:lnTo>
+                    <a:pt x="5873047" y="242797"/>
+                  </a:lnTo>
+                  <a:lnTo>
+                    <a:pt x="5801424" y="231115"/>
+                  </a:lnTo>
+                  <a:lnTo>
+                    <a:pt x="5729802" y="219201"/>
+                  </a:lnTo>
+                  <a:lnTo>
+                    <a:pt x="5658179" y="207049"/>
+                  </a:lnTo>
+                  <a:lnTo>
+                    <a:pt x="5586557" y="194655"/>
+                  </a:lnTo>
+                  <a:lnTo>
+                    <a:pt x="5514934" y="182014"/>
+                  </a:lnTo>
+                  <a:lnTo>
+                    <a:pt x="5443311" y="169120"/>
+                  </a:lnTo>
+                  <a:lnTo>
+                    <a:pt x="5371689" y="155970"/>
+                  </a:lnTo>
+                  <a:lnTo>
+                    <a:pt x="5300066" y="142557"/>
+                  </a:lnTo>
+                  <a:lnTo>
+                    <a:pt x="5228444" y="128877"/>
+                  </a:lnTo>
+                  <a:lnTo>
+                    <a:pt x="5156821" y="114924"/>
+                  </a:lnTo>
+                  <a:lnTo>
+                    <a:pt x="5085199" y="100693"/>
+                  </a:lnTo>
+                  <a:lnTo>
+                    <a:pt x="5013576" y="86179"/>
+                  </a:lnTo>
+                  <a:lnTo>
+                    <a:pt x="4941954" y="71374"/>
+                  </a:lnTo>
+                  <a:lnTo>
+                    <a:pt x="4870331" y="56275"/>
+                  </a:lnTo>
+                  <a:lnTo>
+                    <a:pt x="4798709" y="40875"/>
+                  </a:lnTo>
+                  <a:lnTo>
+                    <a:pt x="4727086" y="25167"/>
+                  </a:lnTo>
+                  <a:lnTo>
+                    <a:pt x="4655464" y="9147"/>
                   </a:lnTo>
                   <a:lnTo>
                     <a:pt x="4583841" y="0"/>
                   </a:lnTo>
                   <a:lnTo>
-                    <a:pt x="4512219" y="1914"/>
-                  </a:lnTo>
-                  <a:lnTo>
-                    <a:pt x="4440596" y="3824"/>
-                  </a:lnTo>
-                  <a:lnTo>
-                    <a:pt x="4368974" y="5730"/>
-                  </a:lnTo>
-                  <a:lnTo>
-                    <a:pt x="4297351" y="7631"/>
-                  </a:lnTo>
-                  <a:lnTo>
-                    <a:pt x="4225729" y="9528"/>
-                  </a:lnTo>
-                  <a:lnTo>
-                    <a:pt x="4154106" y="11421"/>
-                  </a:lnTo>
-                  <a:lnTo>
-                    <a:pt x="4082483" y="13309"/>
-                  </a:lnTo>
-                  <a:lnTo>
-                    <a:pt x="4010861" y="15193"/>
-                  </a:lnTo>
-                  <a:lnTo>
-                    <a:pt x="3939238" y="17072"/>
-                  </a:lnTo>
-                  <a:lnTo>
-                    <a:pt x="3867616" y="18948"/>
-                  </a:lnTo>
-                  <a:lnTo>
-                    <a:pt x="3795993" y="20818"/>
-                  </a:lnTo>
-                  <a:lnTo>
-                    <a:pt x="3724371" y="22685"/>
-                  </a:lnTo>
-                  <a:lnTo>
-                    <a:pt x="3652748" y="24547"/>
-                  </a:lnTo>
-                  <a:lnTo>
-                    <a:pt x="3581126" y="26405"/>
-                  </a:lnTo>
-                  <a:lnTo>
-                    <a:pt x="3509503" y="28258"/>
-                  </a:lnTo>
-                  <a:lnTo>
-                    <a:pt x="3437881" y="30108"/>
-                  </a:lnTo>
-                  <a:lnTo>
-                    <a:pt x="3366258" y="31953"/>
-                  </a:lnTo>
-                  <a:lnTo>
-                    <a:pt x="3294636" y="33794"/>
-                  </a:lnTo>
-                  <a:lnTo>
-                    <a:pt x="3223013" y="35630"/>
-                  </a:lnTo>
-                  <a:lnTo>
-                    <a:pt x="3151391" y="37462"/>
-                  </a:lnTo>
-                  <a:lnTo>
-                    <a:pt x="3079768" y="39290"/>
-                  </a:lnTo>
-                  <a:lnTo>
-                    <a:pt x="3008146" y="41114"/>
-                  </a:lnTo>
-                  <a:lnTo>
-                    <a:pt x="2936523" y="42934"/>
-                  </a:lnTo>
-                  <a:lnTo>
-                    <a:pt x="2864901" y="44749"/>
-                  </a:lnTo>
-                  <a:lnTo>
-                    <a:pt x="2793278" y="46560"/>
-                  </a:lnTo>
-                  <a:lnTo>
-                    <a:pt x="2721655" y="48367"/>
-                  </a:lnTo>
-                  <a:lnTo>
-                    <a:pt x="2650033" y="50170"/>
-                  </a:lnTo>
-                  <a:lnTo>
-                    <a:pt x="2578410" y="51969"/>
-                  </a:lnTo>
-                  <a:lnTo>
-                    <a:pt x="2506788" y="53763"/>
-                  </a:lnTo>
-                  <a:lnTo>
-                    <a:pt x="2435165" y="55554"/>
-                  </a:lnTo>
-                  <a:lnTo>
-                    <a:pt x="2363543" y="57340"/>
-                  </a:lnTo>
-                  <a:lnTo>
-                    <a:pt x="2291920" y="59122"/>
-                  </a:lnTo>
-                  <a:lnTo>
-                    <a:pt x="2220298" y="60900"/>
-                  </a:lnTo>
-                  <a:lnTo>
-                    <a:pt x="2148675" y="62674"/>
-                  </a:lnTo>
-                  <a:lnTo>
-                    <a:pt x="2077053" y="64444"/>
-                  </a:lnTo>
-                  <a:lnTo>
-                    <a:pt x="2005430" y="66210"/>
-                  </a:lnTo>
-                  <a:lnTo>
-                    <a:pt x="1933808" y="67971"/>
-                  </a:lnTo>
-                  <a:lnTo>
-                    <a:pt x="1862185" y="69729"/>
-                  </a:lnTo>
-                  <a:lnTo>
-                    <a:pt x="1790563" y="71482"/>
-                  </a:lnTo>
-                  <a:lnTo>
-                    <a:pt x="1718940" y="73232"/>
-                  </a:lnTo>
-                  <a:lnTo>
-                    <a:pt x="1647318" y="74977"/>
-                  </a:lnTo>
-                  <a:lnTo>
-                    <a:pt x="1575695" y="76718"/>
-                  </a:lnTo>
-                  <a:lnTo>
-                    <a:pt x="1504073" y="78456"/>
-                  </a:lnTo>
-                  <a:lnTo>
-                    <a:pt x="1432450" y="80189"/>
-                  </a:lnTo>
-                  <a:lnTo>
-                    <a:pt x="1360827" y="81918"/>
-                  </a:lnTo>
-                  <a:lnTo>
-                    <a:pt x="1289205" y="83644"/>
-                  </a:lnTo>
-                  <a:lnTo>
-                    <a:pt x="1217582" y="85365"/>
-                  </a:lnTo>
-                  <a:lnTo>
-                    <a:pt x="1145960" y="87082"/>
-                  </a:lnTo>
-                  <a:lnTo>
-                    <a:pt x="1074337" y="88796"/>
-                  </a:lnTo>
-                  <a:lnTo>
-                    <a:pt x="1002715" y="90505"/>
-                  </a:lnTo>
-                  <a:lnTo>
-                    <a:pt x="931092" y="92211"/>
-                  </a:lnTo>
-                  <a:lnTo>
-                    <a:pt x="859470" y="93912"/>
-                  </a:lnTo>
-                  <a:lnTo>
-                    <a:pt x="787847" y="95610"/>
-                  </a:lnTo>
-                  <a:lnTo>
-                    <a:pt x="716225" y="97304"/>
-                  </a:lnTo>
-                  <a:lnTo>
-                    <a:pt x="644602" y="98993"/>
-                  </a:lnTo>
-                  <a:lnTo>
-                    <a:pt x="572980" y="100679"/>
-                  </a:lnTo>
-                  <a:lnTo>
-                    <a:pt x="501357" y="102361"/>
-                  </a:lnTo>
-                  <a:lnTo>
-                    <a:pt x="429735" y="104039"/>
-                  </a:lnTo>
-                  <a:lnTo>
-                    <a:pt x="358112" y="105714"/>
-                  </a:lnTo>
-                  <a:lnTo>
-                    <a:pt x="286490" y="107384"/>
-                  </a:lnTo>
-                  <a:lnTo>
-                    <a:pt x="214867" y="109050"/>
-                  </a:lnTo>
-                  <a:lnTo>
-                    <a:pt x="143245" y="110713"/>
-                  </a:lnTo>
-                  <a:lnTo>
-                    <a:pt x="71622" y="112372"/>
-                  </a:lnTo>
-                  <a:lnTo>
-                    <a:pt x="0" y="114027"/>
+                    <a:pt x="4512219" y="2024"/>
+                  </a:lnTo>
+                  <a:lnTo>
+                    <a:pt x="4440596" y="4043"/>
+                  </a:lnTo>
+                  <a:lnTo>
+                    <a:pt x="4368974" y="6058"/>
+                  </a:lnTo>
+                  <a:lnTo>
+                    <a:pt x="4297351" y="8067"/>
+                  </a:lnTo>
+                  <a:lnTo>
+                    <a:pt x="4225729" y="10072"/>
+                  </a:lnTo>
+                  <a:lnTo>
+                    <a:pt x="4154106" y="12071"/>
+                  </a:lnTo>
+                  <a:lnTo>
+                    <a:pt x="4082483" y="14066"/>
+                  </a:lnTo>
+                  <a:lnTo>
+                    <a:pt x="4010861" y="16056"/>
+                  </a:lnTo>
+                  <a:lnTo>
+                    <a:pt x="3939238" y="18041"/>
+                  </a:lnTo>
+                  <a:lnTo>
+                    <a:pt x="3867616" y="20021"/>
+                  </a:lnTo>
+                  <a:lnTo>
+                    <a:pt x="3795993" y="21997"/>
+                  </a:lnTo>
+                  <a:lnTo>
+                    <a:pt x="3724371" y="23967"/>
+                  </a:lnTo>
+                  <a:lnTo>
+                    <a:pt x="3652748" y="25933"/>
+                  </a:lnTo>
+                  <a:lnTo>
+                    <a:pt x="3581126" y="27894"/>
+                  </a:lnTo>
+                  <a:lnTo>
+                    <a:pt x="3509503" y="29850"/>
+                  </a:lnTo>
+                  <a:lnTo>
+                    <a:pt x="3437881" y="31802"/>
+                  </a:lnTo>
+                  <a:lnTo>
+                    <a:pt x="3366258" y="33748"/>
+                  </a:lnTo>
+                  <a:lnTo>
+                    <a:pt x="3294636" y="35690"/>
+                  </a:lnTo>
+                  <a:lnTo>
+                    <a:pt x="3223013" y="37627"/>
+                  </a:lnTo>
+                  <a:lnTo>
+                    <a:pt x="3151391" y="39560"/>
+                  </a:lnTo>
+                  <a:lnTo>
+                    <a:pt x="3079768" y="41487"/>
+                  </a:lnTo>
+                  <a:lnTo>
+                    <a:pt x="3008146" y="43410"/>
+                  </a:lnTo>
+                  <a:lnTo>
+                    <a:pt x="2936523" y="45329"/>
+                  </a:lnTo>
+                  <a:lnTo>
+                    <a:pt x="2864901" y="47242"/>
+                  </a:lnTo>
+                  <a:lnTo>
+                    <a:pt x="2793278" y="49151"/>
+                  </a:lnTo>
+                  <a:lnTo>
+                    <a:pt x="2721655" y="51055"/>
+                  </a:lnTo>
+                  <a:lnTo>
+                    <a:pt x="2650033" y="52955"/>
+                  </a:lnTo>
+                  <a:lnTo>
+                    <a:pt x="2578410" y="54850"/>
+                  </a:lnTo>
+                  <a:lnTo>
+                    <a:pt x="2506788" y="56740"/>
+                  </a:lnTo>
+                  <a:lnTo>
+                    <a:pt x="2435165" y="58626"/>
+                  </a:lnTo>
+                  <a:lnTo>
+                    <a:pt x="2363543" y="60507"/>
+                  </a:lnTo>
+                  <a:lnTo>
+                    <a:pt x="2291920" y="62383"/>
+                  </a:lnTo>
+                  <a:lnTo>
+                    <a:pt x="2220298" y="64255"/>
+                  </a:lnTo>
+                  <a:lnTo>
+                    <a:pt x="2148675" y="66123"/>
+                  </a:lnTo>
+                  <a:lnTo>
+                    <a:pt x="2077053" y="67985"/>
+                  </a:lnTo>
+                  <a:lnTo>
+                    <a:pt x="2005430" y="69844"/>
+                  </a:lnTo>
+                  <a:lnTo>
+                    <a:pt x="1933808" y="71697"/>
+                  </a:lnTo>
+                  <a:lnTo>
+                    <a:pt x="1862185" y="73546"/>
+                  </a:lnTo>
+                  <a:lnTo>
+                    <a:pt x="1790563" y="75391"/>
+                  </a:lnTo>
+                  <a:lnTo>
+                    <a:pt x="1718940" y="77231"/>
+                  </a:lnTo>
+                  <a:lnTo>
+                    <a:pt x="1647318" y="79067"/>
+                  </a:lnTo>
+                  <a:lnTo>
+                    <a:pt x="1575695" y="80898"/>
+                  </a:lnTo>
+                  <a:lnTo>
+                    <a:pt x="1504073" y="82725"/>
+                  </a:lnTo>
+                  <a:lnTo>
+                    <a:pt x="1432450" y="84547"/>
+                  </a:lnTo>
+                  <a:lnTo>
+                    <a:pt x="1360827" y="86365"/>
+                  </a:lnTo>
+                  <a:lnTo>
+                    <a:pt x="1289205" y="88178"/>
+                  </a:lnTo>
+                  <a:lnTo>
+                    <a:pt x="1217582" y="89987"/>
+                  </a:lnTo>
+                  <a:lnTo>
+                    <a:pt x="1145960" y="91791"/>
+                  </a:lnTo>
+                  <a:lnTo>
+                    <a:pt x="1074337" y="93591"/>
+                  </a:lnTo>
+                  <a:lnTo>
+                    <a:pt x="1002715" y="95387"/>
+                  </a:lnTo>
+                  <a:lnTo>
+                    <a:pt x="931092" y="97178"/>
+                  </a:lnTo>
+                  <a:lnTo>
+                    <a:pt x="859470" y="98965"/>
+                  </a:lnTo>
+                  <a:lnTo>
+                    <a:pt x="787847" y="100748"/>
+                  </a:lnTo>
+                  <a:lnTo>
+                    <a:pt x="716225" y="102526"/>
+                  </a:lnTo>
+                  <a:lnTo>
+                    <a:pt x="644602" y="104300"/>
+                  </a:lnTo>
+                  <a:lnTo>
+                    <a:pt x="572980" y="106069"/>
+                  </a:lnTo>
+                  <a:lnTo>
+                    <a:pt x="501357" y="107835"/>
+                  </a:lnTo>
+                  <a:lnTo>
+                    <a:pt x="429735" y="109596"/>
+                  </a:lnTo>
+                  <a:lnTo>
+                    <a:pt x="358112" y="111352"/>
+                  </a:lnTo>
+                  <a:lnTo>
+                    <a:pt x="286490" y="113104"/>
+                  </a:lnTo>
+                  <a:lnTo>
+                    <a:pt x="214867" y="114852"/>
+                  </a:lnTo>
+                  <a:lnTo>
+                    <a:pt x="143245" y="116596"/>
+                  </a:lnTo>
+                  <a:lnTo>
+                    <a:pt x="71622" y="118336"/>
+                  </a:lnTo>
+                  <a:lnTo>
+                    <a:pt x="0" y="120071"/>
                   </a:lnTo>
                 </a:path>
               </a:pathLst>
@@ -4197,312 +4197,312 @@
           </p:nvSpPr>
           <p:spPr>
             <a:xfrm>
-              <a:off x="1172049" y="4096956"/>
-              <a:ext cx="7090630" cy="848281"/>
+              <a:off x="1172049" y="4109691"/>
+              <a:ext cx="7090630" cy="832657"/>
             </a:xfrm>
             <a:custGeom>
               <a:avLst/>
               <a:pathLst>
-                <a:path w="7090630" h="848281">
+                <a:path w="7090630" h="832657">
                   <a:moveTo>
                     <a:pt x="0" y="0"/>
                   </a:moveTo>
                   <a:lnTo>
-                    <a:pt x="71622" y="12771"/>
-                  </a:lnTo>
-                  <a:lnTo>
-                    <a:pt x="143245" y="25431"/>
-                  </a:lnTo>
-                  <a:lnTo>
-                    <a:pt x="214867" y="37980"/>
-                  </a:lnTo>
-                  <a:lnTo>
-                    <a:pt x="286490" y="50419"/>
-                  </a:lnTo>
-                  <a:lnTo>
-                    <a:pt x="358112" y="62749"/>
-                  </a:lnTo>
-                  <a:lnTo>
-                    <a:pt x="429735" y="74972"/>
-                  </a:lnTo>
-                  <a:lnTo>
-                    <a:pt x="501357" y="87088"/>
-                  </a:lnTo>
-                  <a:lnTo>
-                    <a:pt x="572980" y="99097"/>
-                  </a:lnTo>
-                  <a:lnTo>
-                    <a:pt x="644602" y="111002"/>
-                  </a:lnTo>
-                  <a:lnTo>
-                    <a:pt x="716225" y="122803"/>
-                  </a:lnTo>
-                  <a:lnTo>
-                    <a:pt x="787847" y="134500"/>
-                  </a:lnTo>
-                  <a:lnTo>
-                    <a:pt x="859470" y="146095"/>
-                  </a:lnTo>
-                  <a:lnTo>
-                    <a:pt x="931092" y="157589"/>
-                  </a:lnTo>
-                  <a:lnTo>
-                    <a:pt x="1002715" y="168982"/>
-                  </a:lnTo>
-                  <a:lnTo>
-                    <a:pt x="1074337" y="180276"/>
-                  </a:lnTo>
-                  <a:lnTo>
-                    <a:pt x="1145960" y="191470"/>
-                  </a:lnTo>
-                  <a:lnTo>
-                    <a:pt x="1217582" y="202567"/>
-                  </a:lnTo>
-                  <a:lnTo>
-                    <a:pt x="1289205" y="213567"/>
-                  </a:lnTo>
-                  <a:lnTo>
-                    <a:pt x="1360827" y="224471"/>
-                  </a:lnTo>
-                  <a:lnTo>
-                    <a:pt x="1432450" y="235279"/>
-                  </a:lnTo>
-                  <a:lnTo>
-                    <a:pt x="1504073" y="245992"/>
-                  </a:lnTo>
-                  <a:lnTo>
-                    <a:pt x="1575695" y="256612"/>
-                  </a:lnTo>
-                  <a:lnTo>
-                    <a:pt x="1647318" y="267140"/>
-                  </a:lnTo>
-                  <a:lnTo>
-                    <a:pt x="1718940" y="277575"/>
-                  </a:lnTo>
-                  <a:lnTo>
-                    <a:pt x="1790563" y="287918"/>
-                  </a:lnTo>
-                  <a:lnTo>
-                    <a:pt x="1862185" y="298172"/>
-                  </a:lnTo>
-                  <a:lnTo>
-                    <a:pt x="1933808" y="308335"/>
-                  </a:lnTo>
-                  <a:lnTo>
-                    <a:pt x="2005430" y="318410"/>
-                  </a:lnTo>
-                  <a:lnTo>
-                    <a:pt x="2077053" y="328397"/>
-                  </a:lnTo>
-                  <a:lnTo>
-                    <a:pt x="2148675" y="338296"/>
-                  </a:lnTo>
-                  <a:lnTo>
-                    <a:pt x="2220298" y="348109"/>
-                  </a:lnTo>
-                  <a:lnTo>
-                    <a:pt x="2291920" y="357836"/>
-                  </a:lnTo>
-                  <a:lnTo>
-                    <a:pt x="2363543" y="367478"/>
-                  </a:lnTo>
-                  <a:lnTo>
-                    <a:pt x="2435165" y="377035"/>
-                  </a:lnTo>
-                  <a:lnTo>
-                    <a:pt x="2506788" y="386509"/>
-                  </a:lnTo>
-                  <a:lnTo>
-                    <a:pt x="2578410" y="395900"/>
-                  </a:lnTo>
-                  <a:lnTo>
-                    <a:pt x="2650033" y="405209"/>
-                  </a:lnTo>
-                  <a:lnTo>
-                    <a:pt x="2721655" y="414437"/>
-                  </a:lnTo>
-                  <a:lnTo>
-                    <a:pt x="2793278" y="423583"/>
-                  </a:lnTo>
-                  <a:lnTo>
-                    <a:pt x="2864901" y="432650"/>
-                  </a:lnTo>
-                  <a:lnTo>
-                    <a:pt x="2936523" y="441638"/>
-                  </a:lnTo>
-                  <a:lnTo>
-                    <a:pt x="3008146" y="450547"/>
-                  </a:lnTo>
-                  <a:lnTo>
-                    <a:pt x="3079768" y="459378"/>
-                  </a:lnTo>
-                  <a:lnTo>
-                    <a:pt x="3151391" y="468132"/>
-                  </a:lnTo>
-                  <a:lnTo>
-                    <a:pt x="3223013" y="476809"/>
-                  </a:lnTo>
-                  <a:lnTo>
-                    <a:pt x="3294636" y="485410"/>
-                  </a:lnTo>
-                  <a:lnTo>
-                    <a:pt x="3366258" y="493936"/>
-                  </a:lnTo>
-                  <a:lnTo>
-                    <a:pt x="3437881" y="502388"/>
-                  </a:lnTo>
-                  <a:lnTo>
-                    <a:pt x="3509503" y="510765"/>
-                  </a:lnTo>
-                  <a:lnTo>
-                    <a:pt x="3581126" y="519070"/>
-                  </a:lnTo>
-                  <a:lnTo>
-                    <a:pt x="3652748" y="527301"/>
-                  </a:lnTo>
-                  <a:lnTo>
-                    <a:pt x="3724371" y="535461"/>
-                  </a:lnTo>
-                  <a:lnTo>
-                    <a:pt x="3795993" y="543550"/>
-                  </a:lnTo>
-                  <a:lnTo>
-                    <a:pt x="3867616" y="551567"/>
-                  </a:lnTo>
-                  <a:lnTo>
-                    <a:pt x="3939238" y="559515"/>
-                  </a:lnTo>
-                  <a:lnTo>
-                    <a:pt x="4010861" y="567393"/>
-                  </a:lnTo>
-                  <a:lnTo>
-                    <a:pt x="4082483" y="575202"/>
-                  </a:lnTo>
-                  <a:lnTo>
-                    <a:pt x="4154106" y="582943"/>
-                  </a:lnTo>
-                  <a:lnTo>
-                    <a:pt x="4225729" y="590616"/>
-                  </a:lnTo>
-                  <a:lnTo>
-                    <a:pt x="4297351" y="598222"/>
-                  </a:lnTo>
-                  <a:lnTo>
-                    <a:pt x="4368974" y="605761"/>
-                  </a:lnTo>
-                  <a:lnTo>
-                    <a:pt x="4440596" y="613235"/>
-                  </a:lnTo>
-                  <a:lnTo>
-                    <a:pt x="4512219" y="620643"/>
-                  </a:lnTo>
-                  <a:lnTo>
-                    <a:pt x="4583841" y="627986"/>
-                  </a:lnTo>
-                  <a:lnTo>
-                    <a:pt x="4655464" y="635266"/>
-                  </a:lnTo>
-                  <a:lnTo>
-                    <a:pt x="4727086" y="642481"/>
-                  </a:lnTo>
-                  <a:lnTo>
-                    <a:pt x="4798709" y="649633"/>
-                  </a:lnTo>
-                  <a:lnTo>
-                    <a:pt x="4870331" y="656723"/>
-                  </a:lnTo>
-                  <a:lnTo>
-                    <a:pt x="4941954" y="663751"/>
-                  </a:lnTo>
-                  <a:lnTo>
-                    <a:pt x="5013576" y="670718"/>
-                  </a:lnTo>
-                  <a:lnTo>
-                    <a:pt x="5085199" y="677623"/>
-                  </a:lnTo>
-                  <a:lnTo>
-                    <a:pt x="5156821" y="684468"/>
-                  </a:lnTo>
-                  <a:lnTo>
-                    <a:pt x="5228444" y="691253"/>
-                  </a:lnTo>
-                  <a:lnTo>
-                    <a:pt x="5300066" y="697979"/>
-                  </a:lnTo>
-                  <a:lnTo>
-                    <a:pt x="5371689" y="704646"/>
-                  </a:lnTo>
-                  <a:lnTo>
-                    <a:pt x="5443311" y="711255"/>
-                  </a:lnTo>
-                  <a:lnTo>
-                    <a:pt x="5514934" y="717806"/>
-                  </a:lnTo>
-                  <a:lnTo>
-                    <a:pt x="5586557" y="724299"/>
-                  </a:lnTo>
-                  <a:lnTo>
-                    <a:pt x="5658179" y="730736"/>
-                  </a:lnTo>
-                  <a:lnTo>
-                    <a:pt x="5729802" y="737117"/>
-                  </a:lnTo>
-                  <a:lnTo>
-                    <a:pt x="5801424" y="743442"/>
-                  </a:lnTo>
-                  <a:lnTo>
-                    <a:pt x="5873047" y="749711"/>
-                  </a:lnTo>
-                  <a:lnTo>
-                    <a:pt x="5944669" y="755926"/>
-                  </a:lnTo>
-                  <a:lnTo>
-                    <a:pt x="6016292" y="762086"/>
-                  </a:lnTo>
-                  <a:lnTo>
-                    <a:pt x="6087914" y="768192"/>
-                  </a:lnTo>
-                  <a:lnTo>
-                    <a:pt x="6159537" y="774245"/>
-                  </a:lnTo>
-                  <a:lnTo>
-                    <a:pt x="6231159" y="780245"/>
-                  </a:lnTo>
-                  <a:lnTo>
-                    <a:pt x="6302782" y="786193"/>
-                  </a:lnTo>
-                  <a:lnTo>
-                    <a:pt x="6374404" y="792088"/>
-                  </a:lnTo>
-                  <a:lnTo>
-                    <a:pt x="6446027" y="797932"/>
-                  </a:lnTo>
-                  <a:lnTo>
-                    <a:pt x="6517649" y="803725"/>
-                  </a:lnTo>
-                  <a:lnTo>
-                    <a:pt x="6589272" y="809467"/>
-                  </a:lnTo>
-                  <a:lnTo>
-                    <a:pt x="6660894" y="815159"/>
-                  </a:lnTo>
-                  <a:lnTo>
-                    <a:pt x="6732517" y="820801"/>
-                  </a:lnTo>
-                  <a:lnTo>
-                    <a:pt x="6804139" y="826394"/>
-                  </a:lnTo>
-                  <a:lnTo>
-                    <a:pt x="6875762" y="831938"/>
-                  </a:lnTo>
-                  <a:lnTo>
-                    <a:pt x="6947385" y="837434"/>
-                  </a:lnTo>
-                  <a:lnTo>
-                    <a:pt x="7019007" y="842881"/>
-                  </a:lnTo>
-                  <a:lnTo>
-                    <a:pt x="7090630" y="848281"/>
+                    <a:pt x="71622" y="12464"/>
+                  </a:lnTo>
+                  <a:lnTo>
+                    <a:pt x="143245" y="24822"/>
+                  </a:lnTo>
+                  <a:lnTo>
+                    <a:pt x="214867" y="37073"/>
+                  </a:lnTo>
+                  <a:lnTo>
+                    <a:pt x="286490" y="49218"/>
+                  </a:lnTo>
+                  <a:lnTo>
+                    <a:pt x="358112" y="61259"/>
+                  </a:lnTo>
+                  <a:lnTo>
+                    <a:pt x="429735" y="73197"/>
+                  </a:lnTo>
+                  <a:lnTo>
+                    <a:pt x="501357" y="85031"/>
+                  </a:lnTo>
+                  <a:lnTo>
+                    <a:pt x="572980" y="96764"/>
+                  </a:lnTo>
+                  <a:lnTo>
+                    <a:pt x="644602" y="108395"/>
+                  </a:lnTo>
+                  <a:lnTo>
+                    <a:pt x="716225" y="119927"/>
+                  </a:lnTo>
+                  <a:lnTo>
+                    <a:pt x="787847" y="131359"/>
+                  </a:lnTo>
+                  <a:lnTo>
+                    <a:pt x="859470" y="142693"/>
+                  </a:lnTo>
+                  <a:lnTo>
+                    <a:pt x="931092" y="153929"/>
+                  </a:lnTo>
+                  <a:lnTo>
+                    <a:pt x="1002715" y="165068"/>
+                  </a:lnTo>
+                  <a:lnTo>
+                    <a:pt x="1074337" y="176112"/>
+                  </a:lnTo>
+                  <a:lnTo>
+                    <a:pt x="1145960" y="187060"/>
+                  </a:lnTo>
+                  <a:lnTo>
+                    <a:pt x="1217582" y="197914"/>
+                  </a:lnTo>
+                  <a:lnTo>
+                    <a:pt x="1289205" y="208675"/>
+                  </a:lnTo>
+                  <a:lnTo>
+                    <a:pt x="1360827" y="219342"/>
+                  </a:lnTo>
+                  <a:lnTo>
+                    <a:pt x="1432450" y="229919"/>
+                  </a:lnTo>
+                  <a:lnTo>
+                    <a:pt x="1504073" y="240404"/>
+                  </a:lnTo>
+                  <a:lnTo>
+                    <a:pt x="1575695" y="250798"/>
+                  </a:lnTo>
+                  <a:lnTo>
+                    <a:pt x="1647318" y="261103"/>
+                  </a:lnTo>
+                  <a:lnTo>
+                    <a:pt x="1718940" y="271320"/>
+                  </a:lnTo>
+                  <a:lnTo>
+                    <a:pt x="1790563" y="281448"/>
+                  </a:lnTo>
+                  <a:lnTo>
+                    <a:pt x="1862185" y="291490"/>
+                  </a:lnTo>
+                  <a:lnTo>
+                    <a:pt x="1933808" y="301444"/>
+                  </a:lnTo>
+                  <a:lnTo>
+                    <a:pt x="2005430" y="311314"/>
+                  </a:lnTo>
+                  <a:lnTo>
+                    <a:pt x="2077053" y="321098"/>
+                  </a:lnTo>
+                  <a:lnTo>
+                    <a:pt x="2148675" y="330798"/>
+                  </a:lnTo>
+                  <a:lnTo>
+                    <a:pt x="2220298" y="340414"/>
+                  </a:lnTo>
+                  <a:lnTo>
+                    <a:pt x="2291920" y="349947"/>
+                  </a:lnTo>
+                  <a:lnTo>
+                    <a:pt x="2363543" y="359399"/>
+                  </a:lnTo>
+                  <a:lnTo>
+                    <a:pt x="2435165" y="368769"/>
+                  </a:lnTo>
+                  <a:lnTo>
+                    <a:pt x="2506788" y="378058"/>
+                  </a:lnTo>
+                  <a:lnTo>
+                    <a:pt x="2578410" y="387268"/>
+                  </a:lnTo>
+                  <a:lnTo>
+                    <a:pt x="2650033" y="396398"/>
+                  </a:lnTo>
+                  <a:lnTo>
+                    <a:pt x="2721655" y="405449"/>
+                  </a:lnTo>
+                  <a:lnTo>
+                    <a:pt x="2793278" y="414423"/>
+                  </a:lnTo>
+                  <a:lnTo>
+                    <a:pt x="2864901" y="423319"/>
+                  </a:lnTo>
+                  <a:lnTo>
+                    <a:pt x="2936523" y="432139"/>
+                  </a:lnTo>
+                  <a:lnTo>
+                    <a:pt x="3008146" y="440882"/>
+                  </a:lnTo>
+                  <a:lnTo>
+                    <a:pt x="3079768" y="449551"/>
+                  </a:lnTo>
+                  <a:lnTo>
+                    <a:pt x="3151391" y="458144"/>
+                  </a:lnTo>
+                  <a:lnTo>
+                    <a:pt x="3223013" y="466664"/>
+                  </a:lnTo>
+                  <a:lnTo>
+                    <a:pt x="3294636" y="475111"/>
+                  </a:lnTo>
+                  <a:lnTo>
+                    <a:pt x="3366258" y="483484"/>
+                  </a:lnTo>
+                  <a:lnTo>
+                    <a:pt x="3437881" y="491786"/>
+                  </a:lnTo>
+                  <a:lnTo>
+                    <a:pt x="3509503" y="500016"/>
+                  </a:lnTo>
+                  <a:lnTo>
+                    <a:pt x="3581126" y="508175"/>
+                  </a:lnTo>
+                  <a:lnTo>
+                    <a:pt x="3652748" y="516264"/>
+                  </a:lnTo>
+                  <a:lnTo>
+                    <a:pt x="3724371" y="524283"/>
+                  </a:lnTo>
+                  <a:lnTo>
+                    <a:pt x="3795993" y="532234"/>
+                  </a:lnTo>
+                  <a:lnTo>
+                    <a:pt x="3867616" y="540115"/>
+                  </a:lnTo>
+                  <a:lnTo>
+                    <a:pt x="3939238" y="547929"/>
+                  </a:lnTo>
+                  <a:lnTo>
+                    <a:pt x="4010861" y="555676"/>
+                  </a:lnTo>
+                  <a:lnTo>
+                    <a:pt x="4082483" y="563356"/>
+                  </a:lnTo>
+                  <a:lnTo>
+                    <a:pt x="4154106" y="570970"/>
+                  </a:lnTo>
+                  <a:lnTo>
+                    <a:pt x="4225729" y="578518"/>
+                  </a:lnTo>
+                  <a:lnTo>
+                    <a:pt x="4297351" y="586001"/>
+                  </a:lnTo>
+                  <a:lnTo>
+                    <a:pt x="4368974" y="593420"/>
+                  </a:lnTo>
+                  <a:lnTo>
+                    <a:pt x="4440596" y="600775"/>
+                  </a:lnTo>
+                  <a:lnTo>
+                    <a:pt x="4512219" y="608066"/>
+                  </a:lnTo>
+                  <a:lnTo>
+                    <a:pt x="4583841" y="615295"/>
+                  </a:lnTo>
+                  <a:lnTo>
+                    <a:pt x="4655464" y="622462"/>
+                  </a:lnTo>
+                  <a:lnTo>
+                    <a:pt x="4727086" y="629567"/>
+                  </a:lnTo>
+                  <a:lnTo>
+                    <a:pt x="4798709" y="636610"/>
+                  </a:lnTo>
+                  <a:lnTo>
+                    <a:pt x="4870331" y="643593"/>
+                  </a:lnTo>
+                  <a:lnTo>
+                    <a:pt x="4941954" y="650516"/>
+                  </a:lnTo>
+                  <a:lnTo>
+                    <a:pt x="5013576" y="657379"/>
+                  </a:lnTo>
+                  <a:lnTo>
+                    <a:pt x="5085199" y="664184"/>
+                  </a:lnTo>
+                  <a:lnTo>
+                    <a:pt x="5156821" y="670929"/>
+                  </a:lnTo>
+                  <a:lnTo>
+                    <a:pt x="5228444" y="677617"/>
+                  </a:lnTo>
+                  <a:lnTo>
+                    <a:pt x="5300066" y="684247"/>
+                  </a:lnTo>
+                  <a:lnTo>
+                    <a:pt x="5371689" y="690819"/>
+                  </a:lnTo>
+                  <a:lnTo>
+                    <a:pt x="5443311" y="697336"/>
+                  </a:lnTo>
+                  <a:lnTo>
+                    <a:pt x="5514934" y="703796"/>
+                  </a:lnTo>
+                  <a:lnTo>
+                    <a:pt x="5586557" y="710200"/>
+                  </a:lnTo>
+                  <a:lnTo>
+                    <a:pt x="5658179" y="716550"/>
+                  </a:lnTo>
+                  <a:lnTo>
+                    <a:pt x="5729802" y="722844"/>
+                  </a:lnTo>
+                  <a:lnTo>
+                    <a:pt x="5801424" y="729085"/>
+                  </a:lnTo>
+                  <a:lnTo>
+                    <a:pt x="5873047" y="735271"/>
+                  </a:lnTo>
+                  <a:lnTo>
+                    <a:pt x="5944669" y="741405"/>
+                  </a:lnTo>
+                  <a:lnTo>
+                    <a:pt x="6016292" y="747485"/>
+                  </a:lnTo>
+                  <a:lnTo>
+                    <a:pt x="6087914" y="753514"/>
+                  </a:lnTo>
+                  <a:lnTo>
+                    <a:pt x="6159537" y="759490"/>
+                  </a:lnTo>
+                  <a:lnTo>
+                    <a:pt x="6231159" y="765415"/>
+                  </a:lnTo>
+                  <a:lnTo>
+                    <a:pt x="6302782" y="771289"/>
+                  </a:lnTo>
+                  <a:lnTo>
+                    <a:pt x="6374404" y="777112"/>
+                  </a:lnTo>
+                  <a:lnTo>
+                    <a:pt x="6446027" y="782885"/>
+                  </a:lnTo>
+                  <a:lnTo>
+                    <a:pt x="6517649" y="788609"/>
+                  </a:lnTo>
+                  <a:lnTo>
+                    <a:pt x="6589272" y="794283"/>
+                  </a:lnTo>
+                  <a:lnTo>
+                    <a:pt x="6660894" y="799908"/>
+                  </a:lnTo>
+                  <a:lnTo>
+                    <a:pt x="6732517" y="805485"/>
+                  </a:lnTo>
+                  <a:lnTo>
+                    <a:pt x="6804139" y="811014"/>
+                  </a:lnTo>
+                  <a:lnTo>
+                    <a:pt x="6875762" y="816495"/>
+                  </a:lnTo>
+                  <a:lnTo>
+                    <a:pt x="6947385" y="821929"/>
+                  </a:lnTo>
+                  <a:lnTo>
+                    <a:pt x="7019007" y="827316"/>
+                  </a:lnTo>
+                  <a:lnTo>
+                    <a:pt x="7090630" y="832657"/>
                   </a:lnTo>
                 </a:path>
               </a:pathLst>
@@ -5196,7 +5196,7 @@
                   <a:latin typeface="Helvetica"/>
                   <a:cs typeface="Helvetica"/>
                 </a:rPr>
-                <a:t>subHR per 10 mL/min decline: 1.13 (0.97-1.32), p_Bonf = 0.725 (n = 6)  |  per IQR decline (Δ = 21.9): 1.31 (0.93-1.84)  |  IQR: [-10.5, 11.4]</a:t>
+                <a:t>subHR per 10 mL/min decline: 1.13 (0.97-1.32), p_Bonf = 0.759 (n = 6)  |  per IQR decline (Δ = 21.9): 1.31 (0.93-1.84)  |  IQR: [-10.5, 11.4]</a:t>
               </a:r>
             </a:p>
           </p:txBody>
